--- a/output/wordlabs-read-3day.pptx
+++ b/output/wordlabs-read-3day.pptx
@@ -4240,7 +4240,7 @@
                 <a:ea typeface="Calibri" pitchFamily="34" charset="-122"/>
                 <a:cs typeface="Calibri" pitchFamily="34" charset="-120"/>
               </a:rPr>
-              <a:t>"to look at and understand writing"</a:t>
+              <a:t>"to look at and understand"</a:t>
             </a:r>
             <a:endParaRPr lang="en-US" sz="2200" dirty="0"/>
           </a:p>
@@ -4279,7 +4279,7 @@
                 <a:ea typeface="Calibri" pitchFamily="34" charset="-122"/>
                 <a:cs typeface="Calibri" pitchFamily="34" charset="-120"/>
               </a:rPr>
-              <a:t>Origin: Old English: rǣdan</a:t>
+              <a:t>Origin: Old English: raedan</a:t>
             </a:r>
             <a:endParaRPr lang="en-US" sz="1300" dirty="0"/>
           </a:p>
@@ -5288,7 +5288,7 @@
                 <a:ea typeface="Calibri" pitchFamily="34" charset="-122"/>
                 <a:cs typeface="Calibri" pitchFamily="34" charset="-120"/>
               </a:rPr>
-              <a:t>Word Labs  •  wordlabs.app  •  Root: 'read' = to look at and understand writing</a:t>
+              <a:t>Word Labs  •  wordlabs.app  •  Root: 'read' = to look at and understand</a:t>
             </a:r>
             <a:endParaRPr lang="en-US" sz="800" dirty="0"/>
           </a:p>
@@ -5622,7 +5622,7 @@
                 <a:ea typeface="Trebuchet MS" pitchFamily="34" charset="-122"/>
                 <a:cs typeface="Trebuchet MS" pitchFamily="34" charset="-120"/>
               </a:rPr>
-              <a:t>2</a:t>
+              <a:t>0</a:t>
             </a:r>
             <a:pPr algn="ctr" indent="0" marL="0">
               <a:buNone/>
@@ -5636,7 +5636,7 @@
                 <a:ea typeface="Trebuchet MS" pitchFamily="34" charset="-122"/>
                 <a:cs typeface="Trebuchet MS" pitchFamily="34" charset="-120"/>
               </a:rPr>
-              <a:t>  punctuation marks</a:t>
+              <a:t>  punctuation mark</a:t>
             </a:r>
             <a:endParaRPr lang="en-US" sz="2800" dirty="0"/>
           </a:p>
@@ -5928,7 +5928,7 @@
                 <a:ea typeface="Calibri" pitchFamily="34" charset="-122"/>
                 <a:cs typeface="Calibri" pitchFamily="34" charset="-120"/>
               </a:rPr>
-              <a:t>Word Labs  •  wordlabs.app  •  Root: 'read' = to look at and understand writing</a:t>
+              <a:t>Word Labs  •  wordlabs.app  •  Root: 'read' = to look at and understand</a:t>
             </a:r>
             <a:endParaRPr lang="en-US" sz="800" dirty="0"/>
           </a:p>
@@ -6040,7 +6040,7 @@
                 <a:ea typeface="Calibri" pitchFamily="34" charset="-122"/>
                 <a:cs typeface="Calibri" pitchFamily="34" charset="-120"/>
               </a:rPr>
-              <a:t>Can you </a:t>
+              <a:t>She had to </a:t>
             </a:r>
             <a:pPr algn="l" indent="0" marL="0">
               <a:buNone/>
@@ -6071,7 +6071,7 @@
                 <a:ea typeface="Calibri" pitchFamily="34" charset="-122"/>
                 <a:cs typeface="Calibri" pitchFamily="34" charset="-120"/>
               </a:rPr>
-              <a:t> the instructions, because I think I </a:t>
+              <a:t> the instructions carefully because she had </a:t>
             </a:r>
             <a:pPr algn="l" indent="0" marL="0">
               <a:buNone/>
@@ -6102,7 +6102,7 @@
                 <a:ea typeface="Calibri" pitchFamily="34" charset="-122"/>
                 <a:cs typeface="Calibri" pitchFamily="34" charset="-120"/>
               </a:rPr>
-              <a:t> the last step?</a:t>
+              <a:t> the first step.</a:t>
             </a:r>
             <a:endParaRPr lang="en-US" sz="1800" dirty="0"/>
           </a:p>
@@ -6716,7 +6716,7 @@
                 <a:ea typeface="Calibri" pitchFamily="34" charset="-122"/>
                 <a:cs typeface="Calibri" pitchFamily="34" charset="-120"/>
               </a:rPr>
-              <a:t>Word Labs  •  wordlabs.app  •  Root: 'read' = to look at and understand writing</a:t>
+              <a:t>Word Labs  •  wordlabs.app  •  Root: 'read' = to look at and understand</a:t>
             </a:r>
             <a:endParaRPr lang="en-US" sz="800" dirty="0"/>
           </a:p>
@@ -7543,7 +7543,7 @@
                 <a:ea typeface="Calibri" pitchFamily="34" charset="-122"/>
                 <a:cs typeface="Calibri" pitchFamily="34" charset="-120"/>
               </a:rPr>
-              <a:t>Word Labs  •  wordlabs.app  •  Root: 'read' = to look at and understand writing</a:t>
+              <a:t>Word Labs  •  wordlabs.app  •  Root: 'read' = to look at and understand</a:t>
             </a:r>
             <a:endParaRPr lang="en-US" sz="800" dirty="0"/>
           </a:p>
@@ -7821,7 +7821,7 @@
                 <a:ea typeface="Trebuchet MS" pitchFamily="34" charset="-122"/>
                 <a:cs typeface="Trebuchet MS" pitchFamily="34" charset="-120"/>
               </a:rPr>
-              <a:t>re-</a:t>
+              <a:t>re</a:t>
             </a:r>
             <a:endParaRPr lang="en-US" sz="1300" dirty="0"/>
           </a:p>
@@ -7972,7 +7972,7 @@
                 <a:ea typeface="Calibri" pitchFamily="34" charset="-122"/>
                 <a:cs typeface="Calibri" pitchFamily="34" charset="-120"/>
               </a:rPr>
-              <a:t>to look at and understand writing</a:t>
+              <a:t>to look at and understand</a:t>
             </a:r>
             <a:endParaRPr lang="en-US" sz="850" dirty="0"/>
           </a:p>
@@ -8528,7 +8528,7 @@
                 <a:ea typeface="Calibri" pitchFamily="34" charset="-122"/>
                 <a:cs typeface="Calibri" pitchFamily="34" charset="-120"/>
               </a:rPr>
-              <a:t>Word Labs  •  wordlabs.app  •  Root: 'read' = to look at and understand writing</a:t>
+              <a:t>Word Labs  •  wordlabs.app  •  Root: 'read' = to look at and understand</a:t>
             </a:r>
             <a:endParaRPr lang="en-US" sz="800" dirty="0"/>
           </a:p>
@@ -8806,7 +8806,7 @@
                 <a:ea typeface="Trebuchet MS" pitchFamily="34" charset="-122"/>
                 <a:cs typeface="Trebuchet MS" pitchFamily="34" charset="-120"/>
               </a:rPr>
-              <a:t>re-</a:t>
+              <a:t>re</a:t>
             </a:r>
             <a:endParaRPr lang="en-US" sz="1300" dirty="0"/>
           </a:p>
@@ -8957,7 +8957,7 @@
                 <a:ea typeface="Calibri" pitchFamily="34" charset="-122"/>
                 <a:cs typeface="Calibri" pitchFamily="34" charset="-120"/>
               </a:rPr>
-              <a:t>to look at and understand writing</a:t>
+              <a:t>to look at and understand</a:t>
             </a:r>
             <a:endParaRPr lang="en-US" sz="850" dirty="0"/>
           </a:p>
@@ -9645,7 +9645,7 @@
                 <a:ea typeface="Calibri" pitchFamily="34" charset="-122"/>
                 <a:cs typeface="Calibri" pitchFamily="34" charset="-120"/>
               </a:rPr>
-              <a:t>Word Labs  •  wordlabs.app  •  Root: 'read' = to look at and understand writing</a:t>
+              <a:t>Word Labs  •  wordlabs.app  •  Root: 'read' = to look at and understand</a:t>
             </a:r>
             <a:endParaRPr lang="en-US" sz="800" dirty="0"/>
           </a:p>
@@ -9923,7 +9923,7 @@
                 <a:ea typeface="Trebuchet MS" pitchFamily="34" charset="-122"/>
                 <a:cs typeface="Trebuchet MS" pitchFamily="34" charset="-120"/>
               </a:rPr>
-              <a:t>re-</a:t>
+              <a:t>re</a:t>
             </a:r>
             <a:endParaRPr lang="en-US" sz="1300" dirty="0"/>
           </a:p>
@@ -10074,7 +10074,7 @@
                 <a:ea typeface="Calibri" pitchFamily="34" charset="-122"/>
                 <a:cs typeface="Calibri" pitchFamily="34" charset="-120"/>
               </a:rPr>
-              <a:t>to look at and understand writing</a:t>
+              <a:t>to look at and understand</a:t>
             </a:r>
             <a:endParaRPr lang="en-US" sz="850" dirty="0"/>
           </a:p>
@@ -11053,7 +11053,7 @@
                 <a:ea typeface="Calibri" pitchFamily="34" charset="-122"/>
                 <a:cs typeface="Calibri" pitchFamily="34" charset="-120"/>
               </a:rPr>
-              <a:t>Word Labs  •  wordlabs.app  •  Root: 'read' = to look at and understand writing</a:t>
+              <a:t>Word Labs  •  wordlabs.app  •  Root: 'read' = to look at and understand</a:t>
             </a:r>
             <a:endParaRPr lang="en-US" sz="800" dirty="0"/>
           </a:p>
@@ -11880,7 +11880,7 @@
                 <a:ea typeface="Calibri" pitchFamily="34" charset="-122"/>
                 <a:cs typeface="Calibri" pitchFamily="34" charset="-120"/>
               </a:rPr>
-              <a:t>Word Labs  •  wordlabs.app  •  Root: 'read' = to look at and understand writing</a:t>
+              <a:t>Word Labs  •  wordlabs.app  •  Root: 'read' = to look at and understand</a:t>
             </a:r>
             <a:endParaRPr lang="en-US" sz="800" dirty="0"/>
           </a:p>
@@ -12158,7 +12158,7 @@
                 <a:ea typeface="Trebuchet MS" pitchFamily="34" charset="-122"/>
                 <a:cs typeface="Trebuchet MS" pitchFamily="34" charset="-120"/>
               </a:rPr>
-              <a:t>mis-</a:t>
+              <a:t>mis</a:t>
             </a:r>
             <a:endParaRPr lang="en-US" sz="1300" dirty="0"/>
           </a:p>
@@ -12309,7 +12309,7 @@
                 <a:ea typeface="Calibri" pitchFamily="34" charset="-122"/>
                 <a:cs typeface="Calibri" pitchFamily="34" charset="-120"/>
               </a:rPr>
-              <a:t>to look at and understand writing</a:t>
+              <a:t>to look at and understand</a:t>
             </a:r>
             <a:endParaRPr lang="en-US" sz="850" dirty="0"/>
           </a:p>
@@ -12865,7 +12865,7 @@
                 <a:ea typeface="Calibri" pitchFamily="34" charset="-122"/>
                 <a:cs typeface="Calibri" pitchFamily="34" charset="-120"/>
               </a:rPr>
-              <a:t>Word Labs  •  wordlabs.app  •  Root: 'read' = to look at and understand writing</a:t>
+              <a:t>Word Labs  •  wordlabs.app  •  Root: 'read' = to look at and understand</a:t>
             </a:r>
             <a:endParaRPr lang="en-US" sz="800" dirty="0"/>
           </a:p>
@@ -13143,7 +13143,7 @@
                 <a:ea typeface="Trebuchet MS" pitchFamily="34" charset="-122"/>
                 <a:cs typeface="Trebuchet MS" pitchFamily="34" charset="-120"/>
               </a:rPr>
-              <a:t>mis-</a:t>
+              <a:t>mis</a:t>
             </a:r>
             <a:endParaRPr lang="en-US" sz="1300" dirty="0"/>
           </a:p>
@@ -13294,7 +13294,7 @@
                 <a:ea typeface="Calibri" pitchFamily="34" charset="-122"/>
                 <a:cs typeface="Calibri" pitchFamily="34" charset="-120"/>
               </a:rPr>
-              <a:t>to look at and understand writing</a:t>
+              <a:t>to look at and understand</a:t>
             </a:r>
             <a:endParaRPr lang="en-US" sz="850" dirty="0"/>
           </a:p>
@@ -13891,7 +13891,7 @@
                 <a:ea typeface="Calibri" pitchFamily="34" charset="-122"/>
                 <a:cs typeface="Calibri" pitchFamily="34" charset="-120"/>
               </a:rPr>
-              <a:t>Root 'read' — to look at and understand writing</a:t>
+              <a:t>Root 'read' — to look at and understand</a:t>
             </a:r>
             <a:endParaRPr lang="en-US" sz="1600" dirty="0"/>
           </a:p>
@@ -14247,7 +14247,7 @@
                 <a:ea typeface="Calibri" pitchFamily="34" charset="-122"/>
                 <a:cs typeface="Calibri" pitchFamily="34" charset="-120"/>
               </a:rPr>
-              <a:t>Word Labs  •  wordlabs.app  •  Root: 'read' = to look at and understand writing</a:t>
+              <a:t>Word Labs  •  wordlabs.app  •  Root: 'read' = to look at and understand</a:t>
             </a:r>
             <a:endParaRPr lang="en-US" sz="800" dirty="0"/>
           </a:p>
@@ -14525,7 +14525,7 @@
                 <a:ea typeface="Trebuchet MS" pitchFamily="34" charset="-122"/>
                 <a:cs typeface="Trebuchet MS" pitchFamily="34" charset="-120"/>
               </a:rPr>
-              <a:t>mis-</a:t>
+              <a:t>mis</a:t>
             </a:r>
             <a:endParaRPr lang="en-US" sz="1300" dirty="0"/>
           </a:p>
@@ -14676,7 +14676,7 @@
                 <a:ea typeface="Calibri" pitchFamily="34" charset="-122"/>
                 <a:cs typeface="Calibri" pitchFamily="34" charset="-120"/>
               </a:rPr>
-              <a:t>to look at and understand writing</a:t>
+              <a:t>to look at and understand</a:t>
             </a:r>
             <a:endParaRPr lang="en-US" sz="850" dirty="0"/>
           </a:p>
@@ -16003,7 +16003,7 @@
                 <a:ea typeface="Calibri" pitchFamily="34" charset="-122"/>
                 <a:cs typeface="Calibri" pitchFamily="34" charset="-120"/>
               </a:rPr>
-              <a:t>Word Labs  •  wordlabs.app  •  Root: 'read' = to look at and understand writing</a:t>
+              <a:t>Word Labs  •  wordlabs.app  •  Root: 'read' = to look at and understand</a:t>
             </a:r>
             <a:endParaRPr lang="en-US" sz="800" dirty="0"/>
           </a:p>
@@ -16337,7 +16337,7 @@
                 <a:ea typeface="Trebuchet MS" pitchFamily="34" charset="-122"/>
                 <a:cs typeface="Trebuchet MS" pitchFamily="34" charset="-120"/>
               </a:rPr>
-              <a:t>2</a:t>
+              <a:t>0</a:t>
             </a:r>
             <a:pPr algn="ctr" indent="0" marL="0">
               <a:buNone/>
@@ -16351,7 +16351,7 @@
                 <a:ea typeface="Trebuchet MS" pitchFamily="34" charset="-122"/>
                 <a:cs typeface="Trebuchet MS" pitchFamily="34" charset="-120"/>
               </a:rPr>
-              <a:t>  punctuation marks</a:t>
+              <a:t>  punctuation mark</a:t>
             </a:r>
             <a:endParaRPr lang="en-US" sz="2800" dirty="0"/>
           </a:p>
@@ -16643,7 +16643,7 @@
                 <a:ea typeface="Calibri" pitchFamily="34" charset="-122"/>
                 <a:cs typeface="Calibri" pitchFamily="34" charset="-120"/>
               </a:rPr>
-              <a:t>Word Labs  •  wordlabs.app  •  Root: 'read' = to look at and understand writing</a:t>
+              <a:t>Word Labs  •  wordlabs.app  •  Root: 'read' = to look at and understand</a:t>
             </a:r>
             <a:endParaRPr lang="en-US" sz="800" dirty="0"/>
           </a:p>
@@ -16755,7 +16755,7 @@
                 <a:ea typeface="Calibri" pitchFamily="34" charset="-122"/>
                 <a:cs typeface="Calibri" pitchFamily="34" charset="-120"/>
               </a:rPr>
-              <a:t>The keen </a:t>
+              <a:t>The </a:t>
             </a:r>
             <a:pPr algn="l" indent="0" marL="0">
               <a:buNone/>
@@ -16772,7 +16772,7 @@
                 <a:ea typeface="Calibri" pitchFamily="34" charset="-122"/>
                 <a:cs typeface="Calibri" pitchFamily="34" charset="-120"/>
               </a:rPr>
-              <a:t>reader</a:t>
+              <a:t>readable</a:t>
             </a:r>
             <a:pPr algn="l" indent="0" marL="0">
               <a:buNone/>
@@ -16786,7 +16786,7 @@
                 <a:ea typeface="Calibri" pitchFamily="34" charset="-122"/>
                 <a:cs typeface="Calibri" pitchFamily="34" charset="-120"/>
               </a:rPr>
-              <a:t> had to </a:t>
+              <a:t> notice on the board reminded every student that </a:t>
             </a:r>
             <a:pPr algn="l" indent="0" marL="0">
               <a:buNone/>
@@ -16803,7 +16803,7 @@
                 <a:ea typeface="Calibri" pitchFamily="34" charset="-122"/>
                 <a:cs typeface="Calibri" pitchFamily="34" charset="-120"/>
               </a:rPr>
-              <a:t>reread</a:t>
+              <a:t>readiness</a:t>
             </a:r>
             <a:pPr algn="l" indent="0" marL="0">
               <a:buNone/>
@@ -16817,7 +16817,7 @@
                 <a:ea typeface="Calibri" pitchFamily="34" charset="-122"/>
                 <a:cs typeface="Calibri" pitchFamily="34" charset="-120"/>
               </a:rPr>
-              <a:t> the chapter, because she had </a:t>
+              <a:t> for class meant no </a:t>
             </a:r>
             <a:pPr algn="l" indent="0" marL="0">
               <a:buNone/>
@@ -16834,7 +16834,7 @@
                 <a:ea typeface="Calibri" pitchFamily="34" charset="-122"/>
                 <a:cs typeface="Calibri" pitchFamily="34" charset="-120"/>
               </a:rPr>
-              <a:t>misread</a:t>
+              <a:t>unread</a:t>
             </a:r>
             <a:pPr algn="l" indent="0" marL="0">
               <a:buNone/>
@@ -16848,7 +16848,7 @@
                 <a:ea typeface="Calibri" pitchFamily="34" charset="-122"/>
                 <a:cs typeface="Calibri" pitchFamily="34" charset="-120"/>
               </a:rPr>
-              <a:t> the villain's name throughout the story.</a:t>
+              <a:t> homework.</a:t>
             </a:r>
             <a:endParaRPr lang="en-US" sz="1800" dirty="0"/>
           </a:p>
@@ -17003,7 +17003,7 @@
                 <a:ea typeface="Trebuchet MS" pitchFamily="34" charset="-122"/>
                 <a:cs typeface="Trebuchet MS" pitchFamily="34" charset="-120"/>
               </a:rPr>
-              <a:t>reader</a:t>
+              <a:t>readable</a:t>
             </a:r>
             <a:endParaRPr lang="en-US" sz="1400" dirty="0"/>
           </a:p>
@@ -17131,7 +17131,7 @@
                 <a:ea typeface="Trebuchet MS" pitchFamily="34" charset="-122"/>
                 <a:cs typeface="Trebuchet MS" pitchFamily="34" charset="-120"/>
               </a:rPr>
-              <a:t>reread</a:t>
+              <a:t>readiness</a:t>
             </a:r>
             <a:endParaRPr lang="en-US" sz="1400" dirty="0"/>
           </a:p>
@@ -17259,7 +17259,7 @@
                 <a:ea typeface="Trebuchet MS" pitchFamily="34" charset="-122"/>
                 <a:cs typeface="Trebuchet MS" pitchFamily="34" charset="-120"/>
               </a:rPr>
-              <a:t>misread</a:t>
+              <a:t>unread</a:t>
             </a:r>
             <a:endParaRPr lang="en-US" sz="1400" dirty="0"/>
           </a:p>
@@ -17590,7 +17590,7 @@
                 <a:ea typeface="Calibri" pitchFamily="34" charset="-122"/>
                 <a:cs typeface="Calibri" pitchFamily="34" charset="-120"/>
               </a:rPr>
-              <a:t>Word Labs  •  wordlabs.app  •  Root: 'read' = to look at and understand writing</a:t>
+              <a:t>Word Labs  •  wordlabs.app  •  Root: 'read' = to look at and understand</a:t>
             </a:r>
             <a:endParaRPr lang="en-US" sz="800" dirty="0"/>
           </a:p>
@@ -17729,7 +17729,7 @@
                 <a:ea typeface="Trebuchet MS" pitchFamily="34" charset="-122"/>
                 <a:cs typeface="Trebuchet MS" pitchFamily="34" charset="-120"/>
               </a:rPr>
-              <a:t>reader</a:t>
+              <a:t>readable</a:t>
             </a:r>
             <a:endParaRPr lang="en-US" sz="2800" dirty="0"/>
           </a:p>
@@ -18417,7 +18417,7 @@
                 <a:ea typeface="Calibri" pitchFamily="34" charset="-122"/>
                 <a:cs typeface="Calibri" pitchFamily="34" charset="-120"/>
               </a:rPr>
-              <a:t>Word Labs  •  wordlabs.app  •  Root: 'read' = to look at and understand writing</a:t>
+              <a:t>Word Labs  •  wordlabs.app  •  Root: 'read' = to look at and understand</a:t>
             </a:r>
             <a:endParaRPr lang="en-US" sz="800" dirty="0"/>
           </a:p>
@@ -18556,7 +18556,7 @@
                 <a:ea typeface="Trebuchet MS" pitchFamily="34" charset="-122"/>
                 <a:cs typeface="Trebuchet MS" pitchFamily="34" charset="-120"/>
               </a:rPr>
-              <a:t>reader</a:t>
+              <a:t>readable</a:t>
             </a:r>
             <a:endParaRPr lang="en-US" sz="2800" dirty="0"/>
           </a:p>
@@ -18734,7 +18734,7 @@
                 <a:ea typeface="Calibri" pitchFamily="34" charset="-122"/>
                 <a:cs typeface="Calibri" pitchFamily="34" charset="-120"/>
               </a:rPr>
-              <a:t>to look at and understand writing</a:t>
+              <a:t>to look at and understand</a:t>
             </a:r>
             <a:endParaRPr lang="en-US" sz="850" dirty="0"/>
           </a:p>
@@ -18807,7 +18807,7 @@
                 <a:ea typeface="Trebuchet MS" pitchFamily="34" charset="-122"/>
                 <a:cs typeface="Trebuchet MS" pitchFamily="34" charset="-120"/>
               </a:rPr>
-              <a:t>-er</a:t>
+              <a:t>able</a:t>
             </a:r>
             <a:endParaRPr lang="en-US" sz="1300" dirty="0"/>
           </a:p>
@@ -18846,7 +18846,7 @@
                 <a:ea typeface="Calibri" pitchFamily="34" charset="-122"/>
                 <a:cs typeface="Calibri" pitchFamily="34" charset="-120"/>
               </a:rPr>
-              <a:t>a person who does something</a:t>
+              <a:t>able to be</a:t>
             </a:r>
             <a:endParaRPr lang="en-US" sz="850" dirty="0"/>
           </a:p>
@@ -19402,7 +19402,7 @@
                 <a:ea typeface="Calibri" pitchFamily="34" charset="-122"/>
                 <a:cs typeface="Calibri" pitchFamily="34" charset="-120"/>
               </a:rPr>
-              <a:t>Word Labs  •  wordlabs.app  •  Root: 'read' = to look at and understand writing</a:t>
+              <a:t>Word Labs  •  wordlabs.app  •  Root: 'read' = to look at and understand</a:t>
             </a:r>
             <a:endParaRPr lang="en-US" sz="800" dirty="0"/>
           </a:p>
@@ -19541,7 +19541,7 @@
                 <a:ea typeface="Trebuchet MS" pitchFamily="34" charset="-122"/>
                 <a:cs typeface="Trebuchet MS" pitchFamily="34" charset="-120"/>
               </a:rPr>
-              <a:t>reader</a:t>
+              <a:t>readable</a:t>
             </a:r>
             <a:endParaRPr lang="en-US" sz="2800" dirty="0"/>
           </a:p>
@@ -19719,7 +19719,7 @@
                 <a:ea typeface="Calibri" pitchFamily="34" charset="-122"/>
                 <a:cs typeface="Calibri" pitchFamily="34" charset="-120"/>
               </a:rPr>
-              <a:t>to look at and understand writing</a:t>
+              <a:t>to look at and understand</a:t>
             </a:r>
             <a:endParaRPr lang="en-US" sz="850" dirty="0"/>
           </a:p>
@@ -19792,7 +19792,7 @@
                 <a:ea typeface="Trebuchet MS" pitchFamily="34" charset="-122"/>
                 <a:cs typeface="Trebuchet MS" pitchFamily="34" charset="-120"/>
               </a:rPr>
-              <a:t>-er</a:t>
+              <a:t>able</a:t>
             </a:r>
             <a:endParaRPr lang="en-US" sz="1300" dirty="0"/>
           </a:p>
@@ -19831,7 +19831,7 @@
                 <a:ea typeface="Calibri" pitchFamily="34" charset="-122"/>
                 <a:cs typeface="Calibri" pitchFamily="34" charset="-120"/>
               </a:rPr>
-              <a:t>a person who does something</a:t>
+              <a:t>able to be</a:t>
             </a:r>
             <a:endParaRPr lang="en-US" sz="850" dirty="0"/>
           </a:p>
@@ -19938,7 +19938,7 @@
         </p:nvSpPr>
         <p:spPr>
           <a:xfrm>
-            <a:off x="2999232" y="3364992"/>
+            <a:off x="2313432" y="3364992"/>
             <a:ext cx="1645920" cy="475488"/>
           </a:xfrm>
           <a:prstGeom prst="rect">
@@ -19965,7 +19965,7 @@
         </p:nvSpPr>
         <p:spPr>
           <a:xfrm>
-            <a:off x="2999232" y="3364992"/>
+            <a:off x="2313432" y="3364992"/>
             <a:ext cx="1645920" cy="475488"/>
           </a:xfrm>
           <a:prstGeom prst="rect">
@@ -20004,8 +20004,8 @@
         </p:nvSpPr>
         <p:spPr>
           <a:xfrm>
-            <a:off x="4645152" y="3364992"/>
-            <a:ext cx="1097280" cy="475488"/>
+            <a:off x="3959352" y="3364992"/>
+            <a:ext cx="411480" cy="475488"/>
           </a:xfrm>
           <a:prstGeom prst="rect">
             <a:avLst/>
@@ -20043,7 +20043,7 @@
         </p:nvSpPr>
         <p:spPr>
           <a:xfrm>
-            <a:off x="5742432" y="3364992"/>
+            <a:off x="4370832" y="3364992"/>
             <a:ext cx="1645920" cy="475488"/>
           </a:xfrm>
           <a:prstGeom prst="rect">
@@ -20070,7 +20070,7 @@
         </p:nvSpPr>
         <p:spPr>
           <a:xfrm>
-            <a:off x="5742432" y="3364992"/>
+            <a:off x="4370832" y="3364992"/>
             <a:ext cx="1645920" cy="475488"/>
           </a:xfrm>
           <a:prstGeom prst="rect">
@@ -20095,7 +20095,7 @@
                 <a:ea typeface="Trebuchet MS" pitchFamily="34" charset="-122"/>
                 <a:cs typeface="Trebuchet MS" pitchFamily="34" charset="-120"/>
               </a:rPr>
-              <a:t>er</a:t>
+              <a:t>a</a:t>
             </a:r>
             <a:endParaRPr lang="en-US" sz="1400" dirty="0"/>
           </a:p>
@@ -20103,7 +20103,112 @@
       </p:sp>
       <p:sp>
         <p:nvSpPr>
-          <p:cNvPr id="30" name="Shape 28"/>
+          <p:cNvPr id="30" name="Text 28"/>
+          <p:cNvSpPr/>
+          <p:nvPr/>
+        </p:nvSpPr>
+        <p:spPr>
+          <a:xfrm>
+            <a:off x="6016752" y="3364992"/>
+            <a:ext cx="411480" cy="475488"/>
+          </a:xfrm>
+          <a:prstGeom prst="rect">
+            <a:avLst/>
+          </a:prstGeom>
+          <a:noFill/>
+          <a:ln/>
+        </p:spPr>
+        <p:txBody>
+          <a:bodyPr wrap="square" lIns="0" tIns="0" rIns="0" bIns="0" rtlCol="0" anchor="ctr"/>
+          <a:lstStyle/>
+          <a:p>
+            <a:pPr algn="ctr" indent="0" marL="0">
+              <a:buNone/>
+            </a:pPr>
+            <a:r>
+              <a:rPr lang="en-US" sz="1600" b="1" dirty="0">
+                <a:solidFill>
+                  <a:srgbClr val="0D9488"/>
+                </a:solidFill>
+                <a:latin typeface="Trebuchet MS" pitchFamily="34" charset="0"/>
+                <a:ea typeface="Trebuchet MS" pitchFamily="34" charset="-122"/>
+                <a:cs typeface="Trebuchet MS" pitchFamily="34" charset="-120"/>
+              </a:rPr>
+              <a:t>·</a:t>
+            </a:r>
+            <a:endParaRPr lang="en-US" sz="1600" dirty="0"/>
+          </a:p>
+        </p:txBody>
+      </p:sp>
+      <p:sp>
+        <p:nvSpPr>
+          <p:cNvPr id="31" name="Shape 29"/>
+          <p:cNvSpPr/>
+          <p:nvPr/>
+        </p:nvSpPr>
+        <p:spPr>
+          <a:xfrm>
+            <a:off x="6428232" y="3364992"/>
+            <a:ext cx="1645920" cy="475488"/>
+          </a:xfrm>
+          <a:prstGeom prst="rect">
+            <a:avLst>
+              <a:gd name="adj" fmla="val 9615"/>
+            </a:avLst>
+          </a:prstGeom>
+          <a:solidFill>
+            <a:srgbClr val="FFFFFF"/>
+          </a:solidFill>
+          <a:ln w="12700">
+            <a:solidFill>
+              <a:srgbClr val="0D9488"/>
+            </a:solidFill>
+            <a:prstDash val="solid"/>
+          </a:ln>
+        </p:spPr>
+      </p:sp>
+      <p:sp>
+        <p:nvSpPr>
+          <p:cNvPr id="32" name="Text 30"/>
+          <p:cNvSpPr/>
+          <p:nvPr/>
+        </p:nvSpPr>
+        <p:spPr>
+          <a:xfrm>
+            <a:off x="6428232" y="3364992"/>
+            <a:ext cx="1645920" cy="475488"/>
+          </a:xfrm>
+          <a:prstGeom prst="rect">
+            <a:avLst/>
+          </a:prstGeom>
+          <a:noFill/>
+          <a:ln/>
+        </p:spPr>
+        <p:txBody>
+          <a:bodyPr wrap="square" lIns="0" tIns="0" rIns="0" bIns="0" rtlCol="0" anchor="ctr"/>
+          <a:lstStyle/>
+          <a:p>
+            <a:pPr algn="ctr" indent="0" marL="0">
+              <a:buNone/>
+            </a:pPr>
+            <a:r>
+              <a:rPr lang="en-US" sz="1400" b="1" dirty="0">
+                <a:solidFill>
+                  <a:srgbClr val="0D9488"/>
+                </a:solidFill>
+                <a:latin typeface="Trebuchet MS" pitchFamily="34" charset="0"/>
+                <a:ea typeface="Trebuchet MS" pitchFamily="34" charset="-122"/>
+                <a:cs typeface="Trebuchet MS" pitchFamily="34" charset="-120"/>
+              </a:rPr>
+              <a:t>ble</a:t>
+            </a:r>
+            <a:endParaRPr lang="en-US" sz="1400" dirty="0"/>
+          </a:p>
+        </p:txBody>
+      </p:sp>
+      <p:sp>
+        <p:nvSpPr>
+          <p:cNvPr id="33" name="Shape 31"/>
           <p:cNvSpPr/>
           <p:nvPr/>
         </p:nvSpPr>
@@ -20130,7 +20235,7 @@
       </p:sp>
       <p:sp>
         <p:nvSpPr>
-          <p:cNvPr id="31" name="Text 29"/>
+          <p:cNvPr id="34" name="Text 32"/>
           <p:cNvSpPr/>
           <p:nvPr/>
         </p:nvSpPr>
@@ -20169,7 +20274,7 @@
       </p:sp>
       <p:sp>
         <p:nvSpPr>
-          <p:cNvPr id="32" name="Shape 30"/>
+          <p:cNvPr id="35" name="Shape 33"/>
           <p:cNvSpPr/>
           <p:nvPr/>
         </p:nvSpPr>
@@ -20196,7 +20301,7 @@
       </p:sp>
       <p:sp>
         <p:nvSpPr>
-          <p:cNvPr id="33" name="Text 31"/>
+          <p:cNvPr id="36" name="Text 34"/>
           <p:cNvSpPr/>
           <p:nvPr/>
         </p:nvSpPr>
@@ -20519,7 +20624,7 @@
                 <a:ea typeface="Calibri" pitchFamily="34" charset="-122"/>
                 <a:cs typeface="Calibri" pitchFamily="34" charset="-120"/>
               </a:rPr>
-              <a:t>Word Labs  •  wordlabs.app  •  Root: 'read' = to look at and understand writing</a:t>
+              <a:t>Word Labs  •  wordlabs.app  •  Root: 'read' = to look at and understand</a:t>
             </a:r>
             <a:endParaRPr lang="en-US" sz="800" dirty="0"/>
           </a:p>
@@ -20658,7 +20763,7 @@
                 <a:ea typeface="Trebuchet MS" pitchFamily="34" charset="-122"/>
                 <a:cs typeface="Trebuchet MS" pitchFamily="34" charset="-120"/>
               </a:rPr>
-              <a:t>reader</a:t>
+              <a:t>readable</a:t>
             </a:r>
             <a:endParaRPr lang="en-US" sz="2800" dirty="0"/>
           </a:p>
@@ -20836,7 +20941,7 @@
                 <a:ea typeface="Calibri" pitchFamily="34" charset="-122"/>
                 <a:cs typeface="Calibri" pitchFamily="34" charset="-120"/>
               </a:rPr>
-              <a:t>to look at and understand writing</a:t>
+              <a:t>to look at and understand</a:t>
             </a:r>
             <a:endParaRPr lang="en-US" sz="850" dirty="0"/>
           </a:p>
@@ -20909,7 +21014,7 @@
                 <a:ea typeface="Trebuchet MS" pitchFamily="34" charset="-122"/>
                 <a:cs typeface="Trebuchet MS" pitchFamily="34" charset="-120"/>
               </a:rPr>
-              <a:t>-er</a:t>
+              <a:t>able</a:t>
             </a:r>
             <a:endParaRPr lang="en-US" sz="1300" dirty="0"/>
           </a:p>
@@ -20948,7 +21053,7 @@
                 <a:ea typeface="Calibri" pitchFamily="34" charset="-122"/>
                 <a:cs typeface="Calibri" pitchFamily="34" charset="-120"/>
               </a:rPr>
-              <a:t>a person who does something</a:t>
+              <a:t>able to be</a:t>
             </a:r>
             <a:endParaRPr lang="en-US" sz="850" dirty="0"/>
           </a:p>
@@ -21055,7 +21160,7 @@
         </p:nvSpPr>
         <p:spPr>
           <a:xfrm>
-            <a:off x="2999232" y="3364992"/>
+            <a:off x="2313432" y="3364992"/>
             <a:ext cx="1645920" cy="475488"/>
           </a:xfrm>
           <a:prstGeom prst="rect">
@@ -21082,7 +21187,7 @@
         </p:nvSpPr>
         <p:spPr>
           <a:xfrm>
-            <a:off x="2999232" y="3364992"/>
+            <a:off x="2313432" y="3364992"/>
             <a:ext cx="1645920" cy="475488"/>
           </a:xfrm>
           <a:prstGeom prst="rect">
@@ -21121,8 +21226,8 @@
         </p:nvSpPr>
         <p:spPr>
           <a:xfrm>
-            <a:off x="4645152" y="3364992"/>
-            <a:ext cx="1097280" cy="475488"/>
+            <a:off x="3959352" y="3364992"/>
+            <a:ext cx="411480" cy="475488"/>
           </a:xfrm>
           <a:prstGeom prst="rect">
             <a:avLst/>
@@ -21160,7 +21265,7 @@
         </p:nvSpPr>
         <p:spPr>
           <a:xfrm>
-            <a:off x="5742432" y="3364992"/>
+            <a:off x="4370832" y="3364992"/>
             <a:ext cx="1645920" cy="475488"/>
           </a:xfrm>
           <a:prstGeom prst="rect">
@@ -21187,7 +21292,7 @@
         </p:nvSpPr>
         <p:spPr>
           <a:xfrm>
-            <a:off x="5742432" y="3364992"/>
+            <a:off x="4370832" y="3364992"/>
             <a:ext cx="1645920" cy="475488"/>
           </a:xfrm>
           <a:prstGeom prst="rect">
@@ -21212,7 +21317,7 @@
                 <a:ea typeface="Trebuchet MS" pitchFamily="34" charset="-122"/>
                 <a:cs typeface="Trebuchet MS" pitchFamily="34" charset="-120"/>
               </a:rPr>
-              <a:t>er</a:t>
+              <a:t>a</a:t>
             </a:r>
             <a:endParaRPr lang="en-US" sz="1400" dirty="0"/>
           </a:p>
@@ -21220,7 +21325,112 @@
       </p:sp>
       <p:sp>
         <p:nvSpPr>
-          <p:cNvPr id="30" name="Shape 28"/>
+          <p:cNvPr id="30" name="Text 28"/>
+          <p:cNvSpPr/>
+          <p:nvPr/>
+        </p:nvSpPr>
+        <p:spPr>
+          <a:xfrm>
+            <a:off x="6016752" y="3364992"/>
+            <a:ext cx="411480" cy="475488"/>
+          </a:xfrm>
+          <a:prstGeom prst="rect">
+            <a:avLst/>
+          </a:prstGeom>
+          <a:noFill/>
+          <a:ln/>
+        </p:spPr>
+        <p:txBody>
+          <a:bodyPr wrap="square" lIns="0" tIns="0" rIns="0" bIns="0" rtlCol="0" anchor="ctr"/>
+          <a:lstStyle/>
+          <a:p>
+            <a:pPr algn="ctr" indent="0" marL="0">
+              <a:buNone/>
+            </a:pPr>
+            <a:r>
+              <a:rPr lang="en-US" sz="1600" b="1" dirty="0">
+                <a:solidFill>
+                  <a:srgbClr val="0D9488"/>
+                </a:solidFill>
+                <a:latin typeface="Trebuchet MS" pitchFamily="34" charset="0"/>
+                <a:ea typeface="Trebuchet MS" pitchFamily="34" charset="-122"/>
+                <a:cs typeface="Trebuchet MS" pitchFamily="34" charset="-120"/>
+              </a:rPr>
+              <a:t>·</a:t>
+            </a:r>
+            <a:endParaRPr lang="en-US" sz="1600" dirty="0"/>
+          </a:p>
+        </p:txBody>
+      </p:sp>
+      <p:sp>
+        <p:nvSpPr>
+          <p:cNvPr id="31" name="Shape 29"/>
+          <p:cNvSpPr/>
+          <p:nvPr/>
+        </p:nvSpPr>
+        <p:spPr>
+          <a:xfrm>
+            <a:off x="6428232" y="3364992"/>
+            <a:ext cx="1645920" cy="475488"/>
+          </a:xfrm>
+          <a:prstGeom prst="rect">
+            <a:avLst>
+              <a:gd name="adj" fmla="val 9615"/>
+            </a:avLst>
+          </a:prstGeom>
+          <a:solidFill>
+            <a:srgbClr val="FFFFFF"/>
+          </a:solidFill>
+          <a:ln w="12700">
+            <a:solidFill>
+              <a:srgbClr val="0D9488"/>
+            </a:solidFill>
+            <a:prstDash val="solid"/>
+          </a:ln>
+        </p:spPr>
+      </p:sp>
+      <p:sp>
+        <p:nvSpPr>
+          <p:cNvPr id="32" name="Text 30"/>
+          <p:cNvSpPr/>
+          <p:nvPr/>
+        </p:nvSpPr>
+        <p:spPr>
+          <a:xfrm>
+            <a:off x="6428232" y="3364992"/>
+            <a:ext cx="1645920" cy="475488"/>
+          </a:xfrm>
+          <a:prstGeom prst="rect">
+            <a:avLst/>
+          </a:prstGeom>
+          <a:noFill/>
+          <a:ln/>
+        </p:spPr>
+        <p:txBody>
+          <a:bodyPr wrap="square" lIns="0" tIns="0" rIns="0" bIns="0" rtlCol="0" anchor="ctr"/>
+          <a:lstStyle/>
+          <a:p>
+            <a:pPr algn="ctr" indent="0" marL="0">
+              <a:buNone/>
+            </a:pPr>
+            <a:r>
+              <a:rPr lang="en-US" sz="1400" b="1" dirty="0">
+                <a:solidFill>
+                  <a:srgbClr val="0D9488"/>
+                </a:solidFill>
+                <a:latin typeface="Trebuchet MS" pitchFamily="34" charset="0"/>
+                <a:ea typeface="Trebuchet MS" pitchFamily="34" charset="-122"/>
+                <a:cs typeface="Trebuchet MS" pitchFamily="34" charset="-120"/>
+              </a:rPr>
+              <a:t>ble</a:t>
+            </a:r>
+            <a:endParaRPr lang="en-US" sz="1400" dirty="0"/>
+          </a:p>
+        </p:txBody>
+      </p:sp>
+      <p:sp>
+        <p:nvSpPr>
+          <p:cNvPr id="33" name="Shape 31"/>
           <p:cNvSpPr/>
           <p:nvPr/>
         </p:nvSpPr>
@@ -21247,7 +21457,7 @@
       </p:sp>
       <p:sp>
         <p:nvSpPr>
-          <p:cNvPr id="31" name="Text 29"/>
+          <p:cNvPr id="34" name="Text 32"/>
           <p:cNvSpPr/>
           <p:nvPr/>
         </p:nvSpPr>
@@ -21286,7 +21496,7 @@
       </p:sp>
       <p:sp>
         <p:nvSpPr>
-          <p:cNvPr id="32" name="Shape 30"/>
+          <p:cNvPr id="35" name="Shape 33"/>
           <p:cNvSpPr/>
           <p:nvPr/>
         </p:nvSpPr>
@@ -21313,13 +21523,13 @@
       </p:sp>
       <p:sp>
         <p:nvSpPr>
-          <p:cNvPr id="33" name="Shape 31"/>
-          <p:cNvSpPr/>
-          <p:nvPr/>
-        </p:nvSpPr>
-        <p:spPr>
-          <a:xfrm>
-            <a:off x="2670048" y="4169664"/>
+          <p:cNvPr id="36" name="Shape 34"/>
+          <p:cNvSpPr/>
+          <p:nvPr/>
+        </p:nvSpPr>
+        <p:spPr>
+          <a:xfrm>
+            <a:off x="2254649" y="4169664"/>
             <a:ext cx="685800" cy="475488"/>
           </a:xfrm>
           <a:prstGeom prst="rect">
@@ -21340,13 +21550,13 @@
       </p:sp>
       <p:sp>
         <p:nvSpPr>
-          <p:cNvPr id="34" name="Text 32"/>
-          <p:cNvSpPr/>
-          <p:nvPr/>
-        </p:nvSpPr>
-        <p:spPr>
-          <a:xfrm>
-            <a:off x="2670048" y="4169664"/>
+          <p:cNvPr id="37" name="Text 35"/>
+          <p:cNvSpPr/>
+          <p:nvPr/>
+        </p:nvSpPr>
+        <p:spPr>
+          <a:xfrm>
+            <a:off x="2254649" y="4169664"/>
             <a:ext cx="685800" cy="475488"/>
           </a:xfrm>
           <a:prstGeom prst="rect">
@@ -21379,13 +21589,13 @@
       </p:sp>
       <p:sp>
         <p:nvSpPr>
-          <p:cNvPr id="35" name="Shape 33"/>
-          <p:cNvSpPr/>
-          <p:nvPr/>
-        </p:nvSpPr>
-        <p:spPr>
-          <a:xfrm>
-            <a:off x="4123944" y="4169664"/>
+          <p:cNvPr id="38" name="Shape 36"/>
+          <p:cNvSpPr/>
+          <p:nvPr/>
+        </p:nvSpPr>
+        <p:spPr>
+          <a:xfrm>
+            <a:off x="3293146" y="4169664"/>
             <a:ext cx="685800" cy="475488"/>
           </a:xfrm>
           <a:prstGeom prst="rect">
@@ -21406,13 +21616,13 @@
       </p:sp>
       <p:sp>
         <p:nvSpPr>
-          <p:cNvPr id="36" name="Text 34"/>
-          <p:cNvSpPr/>
-          <p:nvPr/>
-        </p:nvSpPr>
-        <p:spPr>
-          <a:xfrm>
-            <a:off x="4123944" y="4169664"/>
+          <p:cNvPr id="39" name="Text 37"/>
+          <p:cNvSpPr/>
+          <p:nvPr/>
+        </p:nvSpPr>
+        <p:spPr>
+          <a:xfrm>
+            <a:off x="3293146" y="4169664"/>
             <a:ext cx="685800" cy="475488"/>
           </a:xfrm>
           <a:prstGeom prst="rect">
@@ -21445,13 +21655,13 @@
       </p:sp>
       <p:sp>
         <p:nvSpPr>
-          <p:cNvPr id="37" name="Shape 35"/>
-          <p:cNvSpPr/>
-          <p:nvPr/>
-        </p:nvSpPr>
-        <p:spPr>
-          <a:xfrm>
-            <a:off x="5577840" y="4169664"/>
+          <p:cNvPr id="40" name="Shape 38"/>
+          <p:cNvSpPr/>
+          <p:nvPr/>
+        </p:nvSpPr>
+        <p:spPr>
+          <a:xfrm>
+            <a:off x="4331643" y="4169664"/>
             <a:ext cx="685800" cy="475488"/>
           </a:xfrm>
           <a:prstGeom prst="rect">
@@ -21472,13 +21682,13 @@
       </p:sp>
       <p:sp>
         <p:nvSpPr>
-          <p:cNvPr id="38" name="Text 36"/>
-          <p:cNvSpPr/>
-          <p:nvPr/>
-        </p:nvSpPr>
-        <p:spPr>
-          <a:xfrm>
-            <a:off x="5577840" y="4169664"/>
+          <p:cNvPr id="41" name="Text 39"/>
+          <p:cNvSpPr/>
+          <p:nvPr/>
+        </p:nvSpPr>
+        <p:spPr>
+          <a:xfrm>
+            <a:off x="4331643" y="4169664"/>
             <a:ext cx="685800" cy="475488"/>
           </a:xfrm>
           <a:prstGeom prst="rect">
@@ -21511,13 +21721,13 @@
       </p:sp>
       <p:sp>
         <p:nvSpPr>
-          <p:cNvPr id="39" name="Shape 37"/>
-          <p:cNvSpPr/>
-          <p:nvPr/>
-        </p:nvSpPr>
-        <p:spPr>
-          <a:xfrm>
-            <a:off x="7031736" y="4169664"/>
+          <p:cNvPr id="42" name="Shape 40"/>
+          <p:cNvSpPr/>
+          <p:nvPr/>
+        </p:nvSpPr>
+        <p:spPr>
+          <a:xfrm>
+            <a:off x="5370141" y="4169664"/>
             <a:ext cx="685800" cy="475488"/>
           </a:xfrm>
           <a:prstGeom prst="rect">
@@ -21538,13 +21748,13 @@
       </p:sp>
       <p:sp>
         <p:nvSpPr>
-          <p:cNvPr id="40" name="Text 38"/>
-          <p:cNvSpPr/>
-          <p:nvPr/>
-        </p:nvSpPr>
-        <p:spPr>
-          <a:xfrm>
-            <a:off x="7031736" y="4169664"/>
+          <p:cNvPr id="43" name="Text 41"/>
+          <p:cNvSpPr/>
+          <p:nvPr/>
+        </p:nvSpPr>
+        <p:spPr>
+          <a:xfrm>
+            <a:off x="5370141" y="4169664"/>
             <a:ext cx="685800" cy="475488"/>
           </a:xfrm>
           <a:prstGeom prst="rect">
@@ -21569,7 +21779,139 @@
                 <a:ea typeface="Trebuchet MS" pitchFamily="34" charset="-122"/>
                 <a:cs typeface="Trebuchet MS" pitchFamily="34" charset="-120"/>
               </a:rPr>
-              <a:t>er</a:t>
+              <a:t>a</a:t>
+            </a:r>
+            <a:endParaRPr lang="en-US" sz="900" dirty="0"/>
+          </a:p>
+        </p:txBody>
+      </p:sp>
+      <p:sp>
+        <p:nvSpPr>
+          <p:cNvPr id="44" name="Shape 42"/>
+          <p:cNvSpPr/>
+          <p:nvPr/>
+        </p:nvSpPr>
+        <p:spPr>
+          <a:xfrm>
+            <a:off x="6408638" y="4169664"/>
+            <a:ext cx="685800" cy="475488"/>
+          </a:xfrm>
+          <a:prstGeom prst="rect">
+            <a:avLst>
+              <a:gd name="adj" fmla="val 7692"/>
+            </a:avLst>
+          </a:prstGeom>
+          <a:solidFill>
+            <a:srgbClr val="FFFFFF"/>
+          </a:solidFill>
+          <a:ln w="12700">
+            <a:solidFill>
+              <a:srgbClr val="DB2777"/>
+            </a:solidFill>
+            <a:prstDash val="solid"/>
+          </a:ln>
+        </p:spPr>
+      </p:sp>
+      <p:sp>
+        <p:nvSpPr>
+          <p:cNvPr id="45" name="Text 43"/>
+          <p:cNvSpPr/>
+          <p:nvPr/>
+        </p:nvSpPr>
+        <p:spPr>
+          <a:xfrm>
+            <a:off x="6408638" y="4169664"/>
+            <a:ext cx="685800" cy="475488"/>
+          </a:xfrm>
+          <a:prstGeom prst="rect">
+            <a:avLst/>
+          </a:prstGeom>
+          <a:noFill/>
+          <a:ln/>
+        </p:spPr>
+        <p:txBody>
+          <a:bodyPr wrap="square" lIns="0" tIns="0" rIns="0" bIns="0" rtlCol="0" anchor="ctr"/>
+          <a:lstStyle/>
+          <a:p>
+            <a:pPr algn="ctr" indent="0" marL="0">
+              <a:buNone/>
+            </a:pPr>
+            <a:r>
+              <a:rPr lang="en-US" sz="900" b="1" dirty="0">
+                <a:solidFill>
+                  <a:srgbClr val="9D174D"/>
+                </a:solidFill>
+                <a:latin typeface="Trebuchet MS" pitchFamily="34" charset="0"/>
+                <a:ea typeface="Trebuchet MS" pitchFamily="34" charset="-122"/>
+                <a:cs typeface="Trebuchet MS" pitchFamily="34" charset="-120"/>
+              </a:rPr>
+              <a:t>b</a:t>
+            </a:r>
+            <a:endParaRPr lang="en-US" sz="900" dirty="0"/>
+          </a:p>
+        </p:txBody>
+      </p:sp>
+      <p:sp>
+        <p:nvSpPr>
+          <p:cNvPr id="46" name="Shape 44"/>
+          <p:cNvSpPr/>
+          <p:nvPr/>
+        </p:nvSpPr>
+        <p:spPr>
+          <a:xfrm>
+            <a:off x="7447135" y="4169664"/>
+            <a:ext cx="685800" cy="475488"/>
+          </a:xfrm>
+          <a:prstGeom prst="rect">
+            <a:avLst>
+              <a:gd name="adj" fmla="val 7692"/>
+            </a:avLst>
+          </a:prstGeom>
+          <a:solidFill>
+            <a:srgbClr val="FFFFFF"/>
+          </a:solidFill>
+          <a:ln w="12700">
+            <a:solidFill>
+              <a:srgbClr val="DB2777"/>
+            </a:solidFill>
+            <a:prstDash val="solid"/>
+          </a:ln>
+        </p:spPr>
+      </p:sp>
+      <p:sp>
+        <p:nvSpPr>
+          <p:cNvPr id="47" name="Text 45"/>
+          <p:cNvSpPr/>
+          <p:nvPr/>
+        </p:nvSpPr>
+        <p:spPr>
+          <a:xfrm>
+            <a:off x="7447135" y="4169664"/>
+            <a:ext cx="685800" cy="475488"/>
+          </a:xfrm>
+          <a:prstGeom prst="rect">
+            <a:avLst/>
+          </a:prstGeom>
+          <a:noFill/>
+          <a:ln/>
+        </p:spPr>
+        <p:txBody>
+          <a:bodyPr wrap="square" lIns="0" tIns="0" rIns="0" bIns="0" rtlCol="0" anchor="ctr"/>
+          <a:lstStyle/>
+          <a:p>
+            <a:pPr algn="ctr" indent="0" marL="0">
+              <a:buNone/>
+            </a:pPr>
+            <a:r>
+              <a:rPr lang="en-US" sz="900" b="1" dirty="0">
+                <a:solidFill>
+                  <a:srgbClr val="9D174D"/>
+                </a:solidFill>
+                <a:latin typeface="Trebuchet MS" pitchFamily="34" charset="0"/>
+                <a:ea typeface="Trebuchet MS" pitchFamily="34" charset="-122"/>
+                <a:cs typeface="Trebuchet MS" pitchFamily="34" charset="-120"/>
+              </a:rPr>
+              <a:t>le</a:t>
             </a:r>
             <a:endParaRPr lang="en-US" sz="900" dirty="0"/>
           </a:p>
@@ -21861,7 +22203,7 @@
                 <a:ea typeface="Calibri" pitchFamily="34" charset="-122"/>
                 <a:cs typeface="Calibri" pitchFamily="34" charset="-120"/>
               </a:rPr>
-              <a:t>Word Labs  •  wordlabs.app  •  Root: 'read' = to look at and understand writing</a:t>
+              <a:t>Word Labs  •  wordlabs.app  •  Root: 'read' = to look at and understand</a:t>
             </a:r>
             <a:endParaRPr lang="en-US" sz="800" dirty="0"/>
           </a:p>
@@ -22000,7 +22342,7 @@
                 <a:ea typeface="Trebuchet MS" pitchFamily="34" charset="-122"/>
                 <a:cs typeface="Trebuchet MS" pitchFamily="34" charset="-120"/>
               </a:rPr>
-              <a:t>reread</a:t>
+              <a:t>readiness</a:t>
             </a:r>
             <a:endParaRPr lang="en-US" sz="2800" dirty="0"/>
           </a:p>
@@ -22688,7 +23030,7 @@
                 <a:ea typeface="Calibri" pitchFamily="34" charset="-122"/>
                 <a:cs typeface="Calibri" pitchFamily="34" charset="-120"/>
               </a:rPr>
-              <a:t>Word Labs  •  wordlabs.app  •  Root: 'read' = to look at and understand writing</a:t>
+              <a:t>Word Labs  •  wordlabs.app  •  Root: 'read' = to look at and understand</a:t>
             </a:r>
             <a:endParaRPr lang="en-US" sz="800" dirty="0"/>
           </a:p>
@@ -22827,7 +23169,7 @@
                 <a:ea typeface="Trebuchet MS" pitchFamily="34" charset="-122"/>
                 <a:cs typeface="Trebuchet MS" pitchFamily="34" charset="-120"/>
               </a:rPr>
-              <a:t>reread</a:t>
+              <a:t>readiness</a:t>
             </a:r>
             <a:endParaRPr lang="en-US" sz="2800" dirty="0"/>
           </a:p>
@@ -22907,7 +23249,7 @@
         </p:nvSpPr>
         <p:spPr>
           <a:xfrm>
-            <a:off x="2938272" y="2258568"/>
+            <a:off x="2221992" y="2258568"/>
             <a:ext cx="1828800" cy="292608"/>
           </a:xfrm>
           <a:prstGeom prst="rect">
@@ -22916,11 +23258,11 @@
             </a:avLst>
           </a:prstGeom>
           <a:solidFill>
-            <a:srgbClr val="DDD6FE"/>
+            <a:srgbClr val="CCFBF1"/>
           </a:solidFill>
           <a:ln w="19050">
             <a:solidFill>
-              <a:srgbClr val="7C3AED"/>
+              <a:srgbClr val="0D9488"/>
             </a:solidFill>
             <a:prstDash val="solid"/>
           </a:ln>
@@ -22941,7 +23283,7 @@
         </p:nvSpPr>
         <p:spPr>
           <a:xfrm>
-            <a:off x="2938272" y="2258568"/>
+            <a:off x="2221992" y="2258568"/>
             <a:ext cx="1828800" cy="292608"/>
           </a:xfrm>
           <a:prstGeom prst="rect">
@@ -22960,13 +23302,13 @@
             <a:r>
               <a:rPr lang="en-US" sz="1300" b="1" dirty="0">
                 <a:solidFill>
-                  <a:srgbClr val="4C1D95"/>
+                  <a:srgbClr val="0F766E"/>
                 </a:solidFill>
                 <a:latin typeface="Trebuchet MS" pitchFamily="34" charset="0"/>
                 <a:ea typeface="Trebuchet MS" pitchFamily="34" charset="-122"/>
                 <a:cs typeface="Trebuchet MS" pitchFamily="34" charset="-120"/>
               </a:rPr>
-              <a:t>re-</a:t>
+              <a:t>read</a:t>
             </a:r>
             <a:endParaRPr lang="en-US" sz="1300" dirty="0"/>
           </a:p>
@@ -22980,7 +23322,7 @@
         </p:nvSpPr>
         <p:spPr>
           <a:xfrm>
-            <a:off x="2938272" y="2569464"/>
+            <a:off x="2221992" y="2569464"/>
             <a:ext cx="1828800" cy="201168"/>
           </a:xfrm>
           <a:prstGeom prst="rect">
@@ -23005,7 +23347,7 @@
                 <a:ea typeface="Calibri" pitchFamily="34" charset="-122"/>
                 <a:cs typeface="Calibri" pitchFamily="34" charset="-120"/>
               </a:rPr>
-              <a:t>again</a:t>
+              <a:t>to look at and understand</a:t>
             </a:r>
             <a:endParaRPr lang="en-US" sz="850" dirty="0"/>
           </a:p>
@@ -23019,7 +23361,7 @@
         </p:nvSpPr>
         <p:spPr>
           <a:xfrm>
-            <a:off x="5803392" y="2258568"/>
+            <a:off x="4370832" y="2258568"/>
             <a:ext cx="1828800" cy="292608"/>
           </a:xfrm>
           <a:prstGeom prst="rect">
@@ -23028,11 +23370,11 @@
             </a:avLst>
           </a:prstGeom>
           <a:solidFill>
-            <a:srgbClr val="CCFBF1"/>
+            <a:srgbClr val="FCE7F3"/>
           </a:solidFill>
           <a:ln w="19050">
             <a:solidFill>
-              <a:srgbClr val="0D9488"/>
+              <a:srgbClr val="DB2777"/>
             </a:solidFill>
             <a:prstDash val="solid"/>
           </a:ln>
@@ -23053,7 +23395,7 @@
         </p:nvSpPr>
         <p:spPr>
           <a:xfrm>
-            <a:off x="5803392" y="2258568"/>
+            <a:off x="4370832" y="2258568"/>
             <a:ext cx="1828800" cy="292608"/>
           </a:xfrm>
           <a:prstGeom prst="rect">
@@ -23072,13 +23414,13 @@
             <a:r>
               <a:rPr lang="en-US" sz="1300" b="1" dirty="0">
                 <a:solidFill>
-                  <a:srgbClr val="0F766E"/>
+                  <a:srgbClr val="9D174D"/>
                 </a:solidFill>
                 <a:latin typeface="Trebuchet MS" pitchFamily="34" charset="0"/>
                 <a:ea typeface="Trebuchet MS" pitchFamily="34" charset="-122"/>
                 <a:cs typeface="Trebuchet MS" pitchFamily="34" charset="-120"/>
               </a:rPr>
-              <a:t>read</a:t>
+              <a:t>i</a:t>
             </a:r>
             <a:endParaRPr lang="en-US" sz="1300" dirty="0"/>
           </a:p>
@@ -23092,7 +23434,7 @@
         </p:nvSpPr>
         <p:spPr>
           <a:xfrm>
-            <a:off x="5803392" y="2569464"/>
+            <a:off x="4370832" y="2569464"/>
             <a:ext cx="1828800" cy="201168"/>
           </a:xfrm>
           <a:prstGeom prst="rect">
@@ -23117,7 +23459,7 @@
                 <a:ea typeface="Calibri" pitchFamily="34" charset="-122"/>
                 <a:cs typeface="Calibri" pitchFamily="34" charset="-120"/>
               </a:rPr>
-              <a:t>to look at and understand writing</a:t>
+              <a:t>connecting vowel</a:t>
             </a:r>
             <a:endParaRPr lang="en-US" sz="850" dirty="0"/>
           </a:p>
@@ -23125,7 +23467,158 @@
       </p:sp>
       <p:sp>
         <p:nvSpPr>
-          <p:cNvPr id="22" name="Shape 20"/>
+          <p:cNvPr id="22" name="Text 20"/>
+          <p:cNvSpPr/>
+          <p:nvPr/>
+        </p:nvSpPr>
+        <p:spPr>
+          <a:xfrm>
+            <a:off x="4370832" y="2752344"/>
+            <a:ext cx="1828800" cy="182880"/>
+          </a:xfrm>
+          <a:prstGeom prst="rect">
+            <a:avLst/>
+          </a:prstGeom>
+          <a:noFill/>
+          <a:ln/>
+        </p:spPr>
+        <p:txBody>
+          <a:bodyPr wrap="square" lIns="0" tIns="0" rIns="0" bIns="0" rtlCol="0" anchor="t"/>
+          <a:lstStyle/>
+          <a:p>
+            <a:pPr algn="ctr" indent="0" marL="0">
+              <a:buNone/>
+            </a:pPr>
+            <a:r>
+              <a:rPr lang="en-US" sz="700" i="1" dirty="0">
+                <a:solidFill>
+                  <a:srgbClr val="94A3B8"/>
+                </a:solidFill>
+                <a:latin typeface="Calibri" pitchFamily="34" charset="0"/>
+                <a:ea typeface="Calibri" pitchFamily="34" charset="-122"/>
+                <a:cs typeface="Calibri" pitchFamily="34" charset="-120"/>
+              </a:rPr>
+              <a:t>links base to suffix</a:t>
+            </a:r>
+            <a:endParaRPr lang="en-US" sz="700" dirty="0"/>
+          </a:p>
+        </p:txBody>
+      </p:sp>
+      <p:sp>
+        <p:nvSpPr>
+          <p:cNvPr id="23" name="Shape 21"/>
+          <p:cNvSpPr/>
+          <p:nvPr/>
+        </p:nvSpPr>
+        <p:spPr>
+          <a:xfrm>
+            <a:off x="6519672" y="2258568"/>
+            <a:ext cx="1828800" cy="292608"/>
+          </a:xfrm>
+          <a:prstGeom prst="rect">
+            <a:avLst>
+              <a:gd name="adj" fmla="val 25000"/>
+            </a:avLst>
+          </a:prstGeom>
+          <a:solidFill>
+            <a:srgbClr val="FCE7F3"/>
+          </a:solidFill>
+          <a:ln w="19050">
+            <a:solidFill>
+              <a:srgbClr val="DB2777"/>
+            </a:solidFill>
+            <a:prstDash val="solid"/>
+          </a:ln>
+          <a:effectLst>
+            <a:outerShdw sx="100000" sy="100000" kx="0" ky="0" algn="bl" rotWithShape="0" blurRad="101600" dist="38100" dir="8100000">
+              <a:srgbClr val="000000">
+                <a:alpha val="12000"/>
+              </a:srgbClr>
+            </a:outerShdw>
+          </a:effectLst>
+        </p:spPr>
+      </p:sp>
+      <p:sp>
+        <p:nvSpPr>
+          <p:cNvPr id="24" name="Text 22"/>
+          <p:cNvSpPr/>
+          <p:nvPr/>
+        </p:nvSpPr>
+        <p:spPr>
+          <a:xfrm>
+            <a:off x="6519672" y="2258568"/>
+            <a:ext cx="1828800" cy="292608"/>
+          </a:xfrm>
+          <a:prstGeom prst="rect">
+            <a:avLst/>
+          </a:prstGeom>
+          <a:noFill/>
+          <a:ln/>
+        </p:spPr>
+        <p:txBody>
+          <a:bodyPr wrap="square" lIns="0" tIns="0" rIns="0" bIns="0" rtlCol="0" anchor="ctr"/>
+          <a:lstStyle/>
+          <a:p>
+            <a:pPr algn="ctr" indent="0" marL="0">
+              <a:buNone/>
+            </a:pPr>
+            <a:r>
+              <a:rPr lang="en-US" sz="1300" b="1" dirty="0">
+                <a:solidFill>
+                  <a:srgbClr val="9D174D"/>
+                </a:solidFill>
+                <a:latin typeface="Trebuchet MS" pitchFamily="34" charset="0"/>
+                <a:ea typeface="Trebuchet MS" pitchFamily="34" charset="-122"/>
+                <a:cs typeface="Trebuchet MS" pitchFamily="34" charset="-120"/>
+              </a:rPr>
+              <a:t>ness</a:t>
+            </a:r>
+            <a:endParaRPr lang="en-US" sz="1300" dirty="0"/>
+          </a:p>
+        </p:txBody>
+      </p:sp>
+      <p:sp>
+        <p:nvSpPr>
+          <p:cNvPr id="25" name="Text 23"/>
+          <p:cNvSpPr/>
+          <p:nvPr/>
+        </p:nvSpPr>
+        <p:spPr>
+          <a:xfrm>
+            <a:off x="6519672" y="2569464"/>
+            <a:ext cx="1828800" cy="201168"/>
+          </a:xfrm>
+          <a:prstGeom prst="rect">
+            <a:avLst/>
+          </a:prstGeom>
+          <a:noFill/>
+          <a:ln/>
+        </p:spPr>
+        <p:txBody>
+          <a:bodyPr wrap="square" lIns="0" tIns="0" rIns="0" bIns="0" rtlCol="0" anchor="t"/>
+          <a:lstStyle/>
+          <a:p>
+            <a:pPr algn="ctr" indent="0" marL="0">
+              <a:buNone/>
+            </a:pPr>
+            <a:r>
+              <a:rPr lang="en-US" sz="850" dirty="0">
+                <a:solidFill>
+                  <a:srgbClr val="475569"/>
+                </a:solidFill>
+                <a:latin typeface="Calibri" pitchFamily="34" charset="0"/>
+                <a:ea typeface="Calibri" pitchFamily="34" charset="-122"/>
+                <a:cs typeface="Calibri" pitchFamily="34" charset="-120"/>
+              </a:rPr>
+              <a:t>state or quality of</a:t>
+            </a:r>
+            <a:endParaRPr lang="en-US" sz="850" dirty="0"/>
+          </a:p>
+        </p:txBody>
+      </p:sp>
+      <p:sp>
+        <p:nvSpPr>
+          <p:cNvPr id="26" name="Shape 24"/>
           <p:cNvSpPr/>
           <p:nvPr/>
         </p:nvSpPr>
@@ -23152,7 +23645,7 @@
       </p:sp>
       <p:sp>
         <p:nvSpPr>
-          <p:cNvPr id="23" name="Text 21"/>
+          <p:cNvPr id="27" name="Text 25"/>
           <p:cNvSpPr/>
           <p:nvPr/>
         </p:nvSpPr>
@@ -23191,7 +23684,7 @@
       </p:sp>
       <p:sp>
         <p:nvSpPr>
-          <p:cNvPr id="24" name="Shape 22"/>
+          <p:cNvPr id="28" name="Shape 26"/>
           <p:cNvSpPr/>
           <p:nvPr/>
         </p:nvSpPr>
@@ -23218,7 +23711,7 @@
       </p:sp>
       <p:sp>
         <p:nvSpPr>
-          <p:cNvPr id="25" name="Text 23"/>
+          <p:cNvPr id="29" name="Text 27"/>
           <p:cNvSpPr/>
           <p:nvPr/>
         </p:nvSpPr>
@@ -23257,7 +23750,7 @@
       </p:sp>
       <p:sp>
         <p:nvSpPr>
-          <p:cNvPr id="26" name="Shape 24"/>
+          <p:cNvPr id="30" name="Shape 28"/>
           <p:cNvSpPr/>
           <p:nvPr/>
         </p:nvSpPr>
@@ -23284,7 +23777,7 @@
       </p:sp>
       <p:sp>
         <p:nvSpPr>
-          <p:cNvPr id="27" name="Text 25"/>
+          <p:cNvPr id="31" name="Text 29"/>
           <p:cNvSpPr/>
           <p:nvPr/>
         </p:nvSpPr>
@@ -23323,7 +23816,7 @@
       </p:sp>
       <p:sp>
         <p:nvSpPr>
-          <p:cNvPr id="28" name="Shape 26"/>
+          <p:cNvPr id="32" name="Shape 30"/>
           <p:cNvSpPr/>
           <p:nvPr/>
         </p:nvSpPr>
@@ -23350,7 +23843,7 @@
       </p:sp>
       <p:sp>
         <p:nvSpPr>
-          <p:cNvPr id="29" name="Text 27"/>
+          <p:cNvPr id="33" name="Text 31"/>
           <p:cNvSpPr/>
           <p:nvPr/>
         </p:nvSpPr>
@@ -23673,7 +24166,7 @@
                 <a:ea typeface="Calibri" pitchFamily="34" charset="-122"/>
                 <a:cs typeface="Calibri" pitchFamily="34" charset="-120"/>
               </a:rPr>
-              <a:t>Word Labs  •  wordlabs.app  •  Root: 'read' = to look at and understand writing</a:t>
+              <a:t>Word Labs  •  wordlabs.app  •  Root: 'read' = to look at and understand</a:t>
             </a:r>
             <a:endParaRPr lang="en-US" sz="800" dirty="0"/>
           </a:p>
@@ -23746,7 +24239,7 @@
                 <a:ea typeface="Trebuchet MS" pitchFamily="34" charset="-122"/>
                 <a:cs typeface="Trebuchet MS" pitchFamily="34" charset="-120"/>
               </a:rPr>
-              <a:t>We are learning that the root 'read' means 'to look at and understand writing'.</a:t>
+              <a:t>We are learning that the root 'read' means 'to look at and understand'.</a:t>
             </a:r>
             <a:endParaRPr lang="en-US" sz="2000" dirty="0"/>
           </a:p>
@@ -24392,7 +24885,7 @@
                 <a:ea typeface="Calibri" pitchFamily="34" charset="-122"/>
                 <a:cs typeface="Calibri" pitchFamily="34" charset="-120"/>
               </a:rPr>
-              <a:t>Word Labs  •  wordlabs.app  •  Root: 'read' = to look at and understand writing</a:t>
+              <a:t>Word Labs  •  wordlabs.app  •  Root: 'read' = to look at and understand</a:t>
             </a:r>
             <a:endParaRPr lang="en-US" sz="800" dirty="0"/>
           </a:p>
@@ -24531,7 +25024,7 @@
                 <a:ea typeface="Trebuchet MS" pitchFamily="34" charset="-122"/>
                 <a:cs typeface="Trebuchet MS" pitchFamily="34" charset="-120"/>
               </a:rPr>
-              <a:t>reread</a:t>
+              <a:t>readiness</a:t>
             </a:r>
             <a:endParaRPr lang="en-US" sz="2800" dirty="0"/>
           </a:p>
@@ -24611,7 +25104,7 @@
         </p:nvSpPr>
         <p:spPr>
           <a:xfrm>
-            <a:off x="2938272" y="2258568"/>
+            <a:off x="2221992" y="2258568"/>
             <a:ext cx="1828800" cy="292608"/>
           </a:xfrm>
           <a:prstGeom prst="rect">
@@ -24620,11 +25113,11 @@
             </a:avLst>
           </a:prstGeom>
           <a:solidFill>
-            <a:srgbClr val="DDD6FE"/>
+            <a:srgbClr val="CCFBF1"/>
           </a:solidFill>
           <a:ln w="19050">
             <a:solidFill>
-              <a:srgbClr val="7C3AED"/>
+              <a:srgbClr val="0D9488"/>
             </a:solidFill>
             <a:prstDash val="solid"/>
           </a:ln>
@@ -24645,7 +25138,7 @@
         </p:nvSpPr>
         <p:spPr>
           <a:xfrm>
-            <a:off x="2938272" y="2258568"/>
+            <a:off x="2221992" y="2258568"/>
             <a:ext cx="1828800" cy="292608"/>
           </a:xfrm>
           <a:prstGeom prst="rect">
@@ -24664,13 +25157,13 @@
             <a:r>
               <a:rPr lang="en-US" sz="1300" b="1" dirty="0">
                 <a:solidFill>
-                  <a:srgbClr val="4C1D95"/>
+                  <a:srgbClr val="0F766E"/>
                 </a:solidFill>
                 <a:latin typeface="Trebuchet MS" pitchFamily="34" charset="0"/>
                 <a:ea typeface="Trebuchet MS" pitchFamily="34" charset="-122"/>
                 <a:cs typeface="Trebuchet MS" pitchFamily="34" charset="-120"/>
               </a:rPr>
-              <a:t>re-</a:t>
+              <a:t>read</a:t>
             </a:r>
             <a:endParaRPr lang="en-US" sz="1300" dirty="0"/>
           </a:p>
@@ -24684,7 +25177,7 @@
         </p:nvSpPr>
         <p:spPr>
           <a:xfrm>
-            <a:off x="2938272" y="2569464"/>
+            <a:off x="2221992" y="2569464"/>
             <a:ext cx="1828800" cy="201168"/>
           </a:xfrm>
           <a:prstGeom prst="rect">
@@ -24709,7 +25202,7 @@
                 <a:ea typeface="Calibri" pitchFamily="34" charset="-122"/>
                 <a:cs typeface="Calibri" pitchFamily="34" charset="-120"/>
               </a:rPr>
-              <a:t>again</a:t>
+              <a:t>to look at and understand</a:t>
             </a:r>
             <a:endParaRPr lang="en-US" sz="850" dirty="0"/>
           </a:p>
@@ -24723,7 +25216,7 @@
         </p:nvSpPr>
         <p:spPr>
           <a:xfrm>
-            <a:off x="5803392" y="2258568"/>
+            <a:off x="4370832" y="2258568"/>
             <a:ext cx="1828800" cy="292608"/>
           </a:xfrm>
           <a:prstGeom prst="rect">
@@ -24732,11 +25225,11 @@
             </a:avLst>
           </a:prstGeom>
           <a:solidFill>
-            <a:srgbClr val="CCFBF1"/>
+            <a:srgbClr val="FCE7F3"/>
           </a:solidFill>
           <a:ln w="19050">
             <a:solidFill>
-              <a:srgbClr val="0D9488"/>
+              <a:srgbClr val="DB2777"/>
             </a:solidFill>
             <a:prstDash val="solid"/>
           </a:ln>
@@ -24757,7 +25250,7 @@
         </p:nvSpPr>
         <p:spPr>
           <a:xfrm>
-            <a:off x="5803392" y="2258568"/>
+            <a:off x="4370832" y="2258568"/>
             <a:ext cx="1828800" cy="292608"/>
           </a:xfrm>
           <a:prstGeom prst="rect">
@@ -24776,13 +25269,13 @@
             <a:r>
               <a:rPr lang="en-US" sz="1300" b="1" dirty="0">
                 <a:solidFill>
-                  <a:srgbClr val="0F766E"/>
+                  <a:srgbClr val="9D174D"/>
                 </a:solidFill>
                 <a:latin typeface="Trebuchet MS" pitchFamily="34" charset="0"/>
                 <a:ea typeface="Trebuchet MS" pitchFamily="34" charset="-122"/>
                 <a:cs typeface="Trebuchet MS" pitchFamily="34" charset="-120"/>
               </a:rPr>
-              <a:t>read</a:t>
+              <a:t>i</a:t>
             </a:r>
             <a:endParaRPr lang="en-US" sz="1300" dirty="0"/>
           </a:p>
@@ -24796,7 +25289,7 @@
         </p:nvSpPr>
         <p:spPr>
           <a:xfrm>
-            <a:off x="5803392" y="2569464"/>
+            <a:off x="4370832" y="2569464"/>
             <a:ext cx="1828800" cy="201168"/>
           </a:xfrm>
           <a:prstGeom prst="rect">
@@ -24821,7 +25314,7 @@
                 <a:ea typeface="Calibri" pitchFamily="34" charset="-122"/>
                 <a:cs typeface="Calibri" pitchFamily="34" charset="-120"/>
               </a:rPr>
-              <a:t>to look at and understand writing</a:t>
+              <a:t>connecting vowel</a:t>
             </a:r>
             <a:endParaRPr lang="en-US" sz="850" dirty="0"/>
           </a:p>
@@ -24829,7 +25322,158 @@
       </p:sp>
       <p:sp>
         <p:nvSpPr>
-          <p:cNvPr id="22" name="Shape 20"/>
+          <p:cNvPr id="22" name="Text 20"/>
+          <p:cNvSpPr/>
+          <p:nvPr/>
+        </p:nvSpPr>
+        <p:spPr>
+          <a:xfrm>
+            <a:off x="4370832" y="2752344"/>
+            <a:ext cx="1828800" cy="182880"/>
+          </a:xfrm>
+          <a:prstGeom prst="rect">
+            <a:avLst/>
+          </a:prstGeom>
+          <a:noFill/>
+          <a:ln/>
+        </p:spPr>
+        <p:txBody>
+          <a:bodyPr wrap="square" lIns="0" tIns="0" rIns="0" bIns="0" rtlCol="0" anchor="t"/>
+          <a:lstStyle/>
+          <a:p>
+            <a:pPr algn="ctr" indent="0" marL="0">
+              <a:buNone/>
+            </a:pPr>
+            <a:r>
+              <a:rPr lang="en-US" sz="700" i="1" dirty="0">
+                <a:solidFill>
+                  <a:srgbClr val="94A3B8"/>
+                </a:solidFill>
+                <a:latin typeface="Calibri" pitchFamily="34" charset="0"/>
+                <a:ea typeface="Calibri" pitchFamily="34" charset="-122"/>
+                <a:cs typeface="Calibri" pitchFamily="34" charset="-120"/>
+              </a:rPr>
+              <a:t>links base to suffix</a:t>
+            </a:r>
+            <a:endParaRPr lang="en-US" sz="700" dirty="0"/>
+          </a:p>
+        </p:txBody>
+      </p:sp>
+      <p:sp>
+        <p:nvSpPr>
+          <p:cNvPr id="23" name="Shape 21"/>
+          <p:cNvSpPr/>
+          <p:nvPr/>
+        </p:nvSpPr>
+        <p:spPr>
+          <a:xfrm>
+            <a:off x="6519672" y="2258568"/>
+            <a:ext cx="1828800" cy="292608"/>
+          </a:xfrm>
+          <a:prstGeom prst="rect">
+            <a:avLst>
+              <a:gd name="adj" fmla="val 25000"/>
+            </a:avLst>
+          </a:prstGeom>
+          <a:solidFill>
+            <a:srgbClr val="FCE7F3"/>
+          </a:solidFill>
+          <a:ln w="19050">
+            <a:solidFill>
+              <a:srgbClr val="DB2777"/>
+            </a:solidFill>
+            <a:prstDash val="solid"/>
+          </a:ln>
+          <a:effectLst>
+            <a:outerShdw sx="100000" sy="100000" kx="0" ky="0" algn="bl" rotWithShape="0" blurRad="101600" dist="38100" dir="8100000">
+              <a:srgbClr val="000000">
+                <a:alpha val="12000"/>
+              </a:srgbClr>
+            </a:outerShdw>
+          </a:effectLst>
+        </p:spPr>
+      </p:sp>
+      <p:sp>
+        <p:nvSpPr>
+          <p:cNvPr id="24" name="Text 22"/>
+          <p:cNvSpPr/>
+          <p:nvPr/>
+        </p:nvSpPr>
+        <p:spPr>
+          <a:xfrm>
+            <a:off x="6519672" y="2258568"/>
+            <a:ext cx="1828800" cy="292608"/>
+          </a:xfrm>
+          <a:prstGeom prst="rect">
+            <a:avLst/>
+          </a:prstGeom>
+          <a:noFill/>
+          <a:ln/>
+        </p:spPr>
+        <p:txBody>
+          <a:bodyPr wrap="square" lIns="0" tIns="0" rIns="0" bIns="0" rtlCol="0" anchor="ctr"/>
+          <a:lstStyle/>
+          <a:p>
+            <a:pPr algn="ctr" indent="0" marL="0">
+              <a:buNone/>
+            </a:pPr>
+            <a:r>
+              <a:rPr lang="en-US" sz="1300" b="1" dirty="0">
+                <a:solidFill>
+                  <a:srgbClr val="9D174D"/>
+                </a:solidFill>
+                <a:latin typeface="Trebuchet MS" pitchFamily="34" charset="0"/>
+                <a:ea typeface="Trebuchet MS" pitchFamily="34" charset="-122"/>
+                <a:cs typeface="Trebuchet MS" pitchFamily="34" charset="-120"/>
+              </a:rPr>
+              <a:t>ness</a:t>
+            </a:r>
+            <a:endParaRPr lang="en-US" sz="1300" dirty="0"/>
+          </a:p>
+        </p:txBody>
+      </p:sp>
+      <p:sp>
+        <p:nvSpPr>
+          <p:cNvPr id="25" name="Text 23"/>
+          <p:cNvSpPr/>
+          <p:nvPr/>
+        </p:nvSpPr>
+        <p:spPr>
+          <a:xfrm>
+            <a:off x="6519672" y="2569464"/>
+            <a:ext cx="1828800" cy="201168"/>
+          </a:xfrm>
+          <a:prstGeom prst="rect">
+            <a:avLst/>
+          </a:prstGeom>
+          <a:noFill/>
+          <a:ln/>
+        </p:spPr>
+        <p:txBody>
+          <a:bodyPr wrap="square" lIns="0" tIns="0" rIns="0" bIns="0" rtlCol="0" anchor="t"/>
+          <a:lstStyle/>
+          <a:p>
+            <a:pPr algn="ctr" indent="0" marL="0">
+              <a:buNone/>
+            </a:pPr>
+            <a:r>
+              <a:rPr lang="en-US" sz="850" dirty="0">
+                <a:solidFill>
+                  <a:srgbClr val="475569"/>
+                </a:solidFill>
+                <a:latin typeface="Calibri" pitchFamily="34" charset="0"/>
+                <a:ea typeface="Calibri" pitchFamily="34" charset="-122"/>
+                <a:cs typeface="Calibri" pitchFamily="34" charset="-120"/>
+              </a:rPr>
+              <a:t>state or quality of</a:t>
+            </a:r>
+            <a:endParaRPr lang="en-US" sz="850" dirty="0"/>
+          </a:p>
+        </p:txBody>
+      </p:sp>
+      <p:sp>
+        <p:nvSpPr>
+          <p:cNvPr id="26" name="Shape 24"/>
           <p:cNvSpPr/>
           <p:nvPr/>
         </p:nvSpPr>
@@ -24856,7 +25500,7 @@
       </p:sp>
       <p:sp>
         <p:nvSpPr>
-          <p:cNvPr id="23" name="Text 21"/>
+          <p:cNvPr id="27" name="Text 25"/>
           <p:cNvSpPr/>
           <p:nvPr/>
         </p:nvSpPr>
@@ -24895,7 +25539,7 @@
       </p:sp>
       <p:sp>
         <p:nvSpPr>
-          <p:cNvPr id="24" name="Shape 22"/>
+          <p:cNvPr id="28" name="Shape 26"/>
           <p:cNvSpPr/>
           <p:nvPr/>
         </p:nvSpPr>
@@ -24922,13 +25566,13 @@
       </p:sp>
       <p:sp>
         <p:nvSpPr>
-          <p:cNvPr id="25" name="Shape 23"/>
-          <p:cNvSpPr/>
-          <p:nvPr/>
-        </p:nvSpPr>
-        <p:spPr>
-          <a:xfrm>
-            <a:off x="2999232" y="3364992"/>
+          <p:cNvPr id="29" name="Shape 27"/>
+          <p:cNvSpPr/>
+          <p:nvPr/>
+        </p:nvSpPr>
+        <p:spPr>
+          <a:xfrm>
+            <a:off x="2313432" y="3364992"/>
             <a:ext cx="1645920" cy="475488"/>
           </a:xfrm>
           <a:prstGeom prst="rect">
@@ -24949,13 +25593,13 @@
       </p:sp>
       <p:sp>
         <p:nvSpPr>
-          <p:cNvPr id="26" name="Text 24"/>
-          <p:cNvSpPr/>
-          <p:nvPr/>
-        </p:nvSpPr>
-        <p:spPr>
-          <a:xfrm>
-            <a:off x="2999232" y="3364992"/>
+          <p:cNvPr id="30" name="Text 28"/>
+          <p:cNvSpPr/>
+          <p:nvPr/>
+        </p:nvSpPr>
+        <p:spPr>
+          <a:xfrm>
+            <a:off x="2313432" y="3364992"/>
             <a:ext cx="1645920" cy="475488"/>
           </a:xfrm>
           <a:prstGeom prst="rect">
@@ -24980,7 +25624,7 @@
                 <a:ea typeface="Trebuchet MS" pitchFamily="34" charset="-122"/>
                 <a:cs typeface="Trebuchet MS" pitchFamily="34" charset="-120"/>
               </a:rPr>
-              <a:t>re</a:t>
+              <a:t>read</a:t>
             </a:r>
             <a:endParaRPr lang="en-US" sz="1400" dirty="0"/>
           </a:p>
@@ -24988,14 +25632,14 @@
       </p:sp>
       <p:sp>
         <p:nvSpPr>
-          <p:cNvPr id="27" name="Text 25"/>
-          <p:cNvSpPr/>
-          <p:nvPr/>
-        </p:nvSpPr>
-        <p:spPr>
-          <a:xfrm>
-            <a:off x="4645152" y="3364992"/>
-            <a:ext cx="1097280" cy="475488"/>
+          <p:cNvPr id="31" name="Text 29"/>
+          <p:cNvSpPr/>
+          <p:nvPr/>
+        </p:nvSpPr>
+        <p:spPr>
+          <a:xfrm>
+            <a:off x="3959352" y="3364992"/>
+            <a:ext cx="411480" cy="475488"/>
           </a:xfrm>
           <a:prstGeom prst="rect">
             <a:avLst/>
@@ -25027,13 +25671,13 @@
       </p:sp>
       <p:sp>
         <p:nvSpPr>
-          <p:cNvPr id="28" name="Shape 26"/>
-          <p:cNvSpPr/>
-          <p:nvPr/>
-        </p:nvSpPr>
-        <p:spPr>
-          <a:xfrm>
-            <a:off x="5742432" y="3364992"/>
+          <p:cNvPr id="32" name="Shape 30"/>
+          <p:cNvSpPr/>
+          <p:nvPr/>
+        </p:nvSpPr>
+        <p:spPr>
+          <a:xfrm>
+            <a:off x="4370832" y="3364992"/>
             <a:ext cx="1645920" cy="475488"/>
           </a:xfrm>
           <a:prstGeom prst="rect">
@@ -25054,13 +25698,13 @@
       </p:sp>
       <p:sp>
         <p:nvSpPr>
-          <p:cNvPr id="29" name="Text 27"/>
-          <p:cNvSpPr/>
-          <p:nvPr/>
-        </p:nvSpPr>
-        <p:spPr>
-          <a:xfrm>
-            <a:off x="5742432" y="3364992"/>
+          <p:cNvPr id="33" name="Text 31"/>
+          <p:cNvSpPr/>
+          <p:nvPr/>
+        </p:nvSpPr>
+        <p:spPr>
+          <a:xfrm>
+            <a:off x="4370832" y="3364992"/>
             <a:ext cx="1645920" cy="475488"/>
           </a:xfrm>
           <a:prstGeom prst="rect">
@@ -25085,7 +25729,7 @@
                 <a:ea typeface="Trebuchet MS" pitchFamily="34" charset="-122"/>
                 <a:cs typeface="Trebuchet MS" pitchFamily="34" charset="-120"/>
               </a:rPr>
-              <a:t>read</a:t>
+              <a:t>i</a:t>
             </a:r>
             <a:endParaRPr lang="en-US" sz="1400" dirty="0"/>
           </a:p>
@@ -25093,7 +25737,112 @@
       </p:sp>
       <p:sp>
         <p:nvSpPr>
-          <p:cNvPr id="30" name="Shape 28"/>
+          <p:cNvPr id="34" name="Text 32"/>
+          <p:cNvSpPr/>
+          <p:nvPr/>
+        </p:nvSpPr>
+        <p:spPr>
+          <a:xfrm>
+            <a:off x="6016752" y="3364992"/>
+            <a:ext cx="411480" cy="475488"/>
+          </a:xfrm>
+          <a:prstGeom prst="rect">
+            <a:avLst/>
+          </a:prstGeom>
+          <a:noFill/>
+          <a:ln/>
+        </p:spPr>
+        <p:txBody>
+          <a:bodyPr wrap="square" lIns="0" tIns="0" rIns="0" bIns="0" rtlCol="0" anchor="ctr"/>
+          <a:lstStyle/>
+          <a:p>
+            <a:pPr algn="ctr" indent="0" marL="0">
+              <a:buNone/>
+            </a:pPr>
+            <a:r>
+              <a:rPr lang="en-US" sz="1600" b="1" dirty="0">
+                <a:solidFill>
+                  <a:srgbClr val="0D9488"/>
+                </a:solidFill>
+                <a:latin typeface="Trebuchet MS" pitchFamily="34" charset="0"/>
+                <a:ea typeface="Trebuchet MS" pitchFamily="34" charset="-122"/>
+                <a:cs typeface="Trebuchet MS" pitchFamily="34" charset="-120"/>
+              </a:rPr>
+              <a:t>·</a:t>
+            </a:r>
+            <a:endParaRPr lang="en-US" sz="1600" dirty="0"/>
+          </a:p>
+        </p:txBody>
+      </p:sp>
+      <p:sp>
+        <p:nvSpPr>
+          <p:cNvPr id="35" name="Shape 33"/>
+          <p:cNvSpPr/>
+          <p:nvPr/>
+        </p:nvSpPr>
+        <p:spPr>
+          <a:xfrm>
+            <a:off x="6428232" y="3364992"/>
+            <a:ext cx="1645920" cy="475488"/>
+          </a:xfrm>
+          <a:prstGeom prst="rect">
+            <a:avLst>
+              <a:gd name="adj" fmla="val 9615"/>
+            </a:avLst>
+          </a:prstGeom>
+          <a:solidFill>
+            <a:srgbClr val="FFFFFF"/>
+          </a:solidFill>
+          <a:ln w="12700">
+            <a:solidFill>
+              <a:srgbClr val="0D9488"/>
+            </a:solidFill>
+            <a:prstDash val="solid"/>
+          </a:ln>
+        </p:spPr>
+      </p:sp>
+      <p:sp>
+        <p:nvSpPr>
+          <p:cNvPr id="36" name="Text 34"/>
+          <p:cNvSpPr/>
+          <p:nvPr/>
+        </p:nvSpPr>
+        <p:spPr>
+          <a:xfrm>
+            <a:off x="6428232" y="3364992"/>
+            <a:ext cx="1645920" cy="475488"/>
+          </a:xfrm>
+          <a:prstGeom prst="rect">
+            <a:avLst/>
+          </a:prstGeom>
+          <a:noFill/>
+          <a:ln/>
+        </p:spPr>
+        <p:txBody>
+          <a:bodyPr wrap="square" lIns="0" tIns="0" rIns="0" bIns="0" rtlCol="0" anchor="ctr"/>
+          <a:lstStyle/>
+          <a:p>
+            <a:pPr algn="ctr" indent="0" marL="0">
+              <a:buNone/>
+            </a:pPr>
+            <a:r>
+              <a:rPr lang="en-US" sz="1400" b="1" dirty="0">
+                <a:solidFill>
+                  <a:srgbClr val="0D9488"/>
+                </a:solidFill>
+                <a:latin typeface="Trebuchet MS" pitchFamily="34" charset="0"/>
+                <a:ea typeface="Trebuchet MS" pitchFamily="34" charset="-122"/>
+                <a:cs typeface="Trebuchet MS" pitchFamily="34" charset="-120"/>
+              </a:rPr>
+              <a:t>ness</a:t>
+            </a:r>
+            <a:endParaRPr lang="en-US" sz="1400" dirty="0"/>
+          </a:p>
+        </p:txBody>
+      </p:sp>
+      <p:sp>
+        <p:nvSpPr>
+          <p:cNvPr id="37" name="Shape 35"/>
           <p:cNvSpPr/>
           <p:nvPr/>
         </p:nvSpPr>
@@ -25120,7 +25869,7 @@
       </p:sp>
       <p:sp>
         <p:nvSpPr>
-          <p:cNvPr id="31" name="Text 29"/>
+          <p:cNvPr id="38" name="Text 36"/>
           <p:cNvSpPr/>
           <p:nvPr/>
         </p:nvSpPr>
@@ -25159,7 +25908,7 @@
       </p:sp>
       <p:sp>
         <p:nvSpPr>
-          <p:cNvPr id="32" name="Shape 30"/>
+          <p:cNvPr id="39" name="Shape 37"/>
           <p:cNvSpPr/>
           <p:nvPr/>
         </p:nvSpPr>
@@ -25186,7 +25935,7 @@
       </p:sp>
       <p:sp>
         <p:nvSpPr>
-          <p:cNvPr id="33" name="Text 31"/>
+          <p:cNvPr id="40" name="Text 38"/>
           <p:cNvSpPr/>
           <p:nvPr/>
         </p:nvSpPr>
@@ -25509,7 +26258,7 @@
                 <a:ea typeface="Calibri" pitchFamily="34" charset="-122"/>
                 <a:cs typeface="Calibri" pitchFamily="34" charset="-120"/>
               </a:rPr>
-              <a:t>Word Labs  •  wordlabs.app  •  Root: 'read' = to look at and understand writing</a:t>
+              <a:t>Word Labs  •  wordlabs.app  •  Root: 'read' = to look at and understand</a:t>
             </a:r>
             <a:endParaRPr lang="en-US" sz="800" dirty="0"/>
           </a:p>
@@ -25648,7 +26397,7 @@
                 <a:ea typeface="Trebuchet MS" pitchFamily="34" charset="-122"/>
                 <a:cs typeface="Trebuchet MS" pitchFamily="34" charset="-120"/>
               </a:rPr>
-              <a:t>reread</a:t>
+              <a:t>readiness</a:t>
             </a:r>
             <a:endParaRPr lang="en-US" sz="2800" dirty="0"/>
           </a:p>
@@ -25728,7 +26477,7 @@
         </p:nvSpPr>
         <p:spPr>
           <a:xfrm>
-            <a:off x="2938272" y="2258568"/>
+            <a:off x="2221992" y="2258568"/>
             <a:ext cx="1828800" cy="292608"/>
           </a:xfrm>
           <a:prstGeom prst="rect">
@@ -25737,11 +26486,11 @@
             </a:avLst>
           </a:prstGeom>
           <a:solidFill>
-            <a:srgbClr val="DDD6FE"/>
+            <a:srgbClr val="CCFBF1"/>
           </a:solidFill>
           <a:ln w="19050">
             <a:solidFill>
-              <a:srgbClr val="7C3AED"/>
+              <a:srgbClr val="0D9488"/>
             </a:solidFill>
             <a:prstDash val="solid"/>
           </a:ln>
@@ -25762,7 +26511,7 @@
         </p:nvSpPr>
         <p:spPr>
           <a:xfrm>
-            <a:off x="2938272" y="2258568"/>
+            <a:off x="2221992" y="2258568"/>
             <a:ext cx="1828800" cy="292608"/>
           </a:xfrm>
           <a:prstGeom prst="rect">
@@ -25781,13 +26530,13 @@
             <a:r>
               <a:rPr lang="en-US" sz="1300" b="1" dirty="0">
                 <a:solidFill>
-                  <a:srgbClr val="4C1D95"/>
+                  <a:srgbClr val="0F766E"/>
                 </a:solidFill>
                 <a:latin typeface="Trebuchet MS" pitchFamily="34" charset="0"/>
                 <a:ea typeface="Trebuchet MS" pitchFamily="34" charset="-122"/>
                 <a:cs typeface="Trebuchet MS" pitchFamily="34" charset="-120"/>
               </a:rPr>
-              <a:t>re-</a:t>
+              <a:t>read</a:t>
             </a:r>
             <a:endParaRPr lang="en-US" sz="1300" dirty="0"/>
           </a:p>
@@ -25801,7 +26550,7 @@
         </p:nvSpPr>
         <p:spPr>
           <a:xfrm>
-            <a:off x="2938272" y="2569464"/>
+            <a:off x="2221992" y="2569464"/>
             <a:ext cx="1828800" cy="201168"/>
           </a:xfrm>
           <a:prstGeom prst="rect">
@@ -25826,7 +26575,7 @@
                 <a:ea typeface="Calibri" pitchFamily="34" charset="-122"/>
                 <a:cs typeface="Calibri" pitchFamily="34" charset="-120"/>
               </a:rPr>
-              <a:t>again</a:t>
+              <a:t>to look at and understand</a:t>
             </a:r>
             <a:endParaRPr lang="en-US" sz="850" dirty="0"/>
           </a:p>
@@ -25840,7 +26589,7 @@
         </p:nvSpPr>
         <p:spPr>
           <a:xfrm>
-            <a:off x="5803392" y="2258568"/>
+            <a:off x="4370832" y="2258568"/>
             <a:ext cx="1828800" cy="292608"/>
           </a:xfrm>
           <a:prstGeom prst="rect">
@@ -25849,11 +26598,11 @@
             </a:avLst>
           </a:prstGeom>
           <a:solidFill>
-            <a:srgbClr val="CCFBF1"/>
+            <a:srgbClr val="FCE7F3"/>
           </a:solidFill>
           <a:ln w="19050">
             <a:solidFill>
-              <a:srgbClr val="0D9488"/>
+              <a:srgbClr val="DB2777"/>
             </a:solidFill>
             <a:prstDash val="solid"/>
           </a:ln>
@@ -25874,7 +26623,7 @@
         </p:nvSpPr>
         <p:spPr>
           <a:xfrm>
-            <a:off x="5803392" y="2258568"/>
+            <a:off x="4370832" y="2258568"/>
             <a:ext cx="1828800" cy="292608"/>
           </a:xfrm>
           <a:prstGeom prst="rect">
@@ -25893,13 +26642,13 @@
             <a:r>
               <a:rPr lang="en-US" sz="1300" b="1" dirty="0">
                 <a:solidFill>
-                  <a:srgbClr val="0F766E"/>
+                  <a:srgbClr val="9D174D"/>
                 </a:solidFill>
                 <a:latin typeface="Trebuchet MS" pitchFamily="34" charset="0"/>
                 <a:ea typeface="Trebuchet MS" pitchFamily="34" charset="-122"/>
                 <a:cs typeface="Trebuchet MS" pitchFamily="34" charset="-120"/>
               </a:rPr>
-              <a:t>read</a:t>
+              <a:t>i</a:t>
             </a:r>
             <a:endParaRPr lang="en-US" sz="1300" dirty="0"/>
           </a:p>
@@ -25913,7 +26662,7 @@
         </p:nvSpPr>
         <p:spPr>
           <a:xfrm>
-            <a:off x="5803392" y="2569464"/>
+            <a:off x="4370832" y="2569464"/>
             <a:ext cx="1828800" cy="201168"/>
           </a:xfrm>
           <a:prstGeom prst="rect">
@@ -25938,7 +26687,7 @@
                 <a:ea typeface="Calibri" pitchFamily="34" charset="-122"/>
                 <a:cs typeface="Calibri" pitchFamily="34" charset="-120"/>
               </a:rPr>
-              <a:t>to look at and understand writing</a:t>
+              <a:t>connecting vowel</a:t>
             </a:r>
             <a:endParaRPr lang="en-US" sz="850" dirty="0"/>
           </a:p>
@@ -25946,7 +26695,158 @@
       </p:sp>
       <p:sp>
         <p:nvSpPr>
-          <p:cNvPr id="22" name="Shape 20"/>
+          <p:cNvPr id="22" name="Text 20"/>
+          <p:cNvSpPr/>
+          <p:nvPr/>
+        </p:nvSpPr>
+        <p:spPr>
+          <a:xfrm>
+            <a:off x="4370832" y="2752344"/>
+            <a:ext cx="1828800" cy="182880"/>
+          </a:xfrm>
+          <a:prstGeom prst="rect">
+            <a:avLst/>
+          </a:prstGeom>
+          <a:noFill/>
+          <a:ln/>
+        </p:spPr>
+        <p:txBody>
+          <a:bodyPr wrap="square" lIns="0" tIns="0" rIns="0" bIns="0" rtlCol="0" anchor="t"/>
+          <a:lstStyle/>
+          <a:p>
+            <a:pPr algn="ctr" indent="0" marL="0">
+              <a:buNone/>
+            </a:pPr>
+            <a:r>
+              <a:rPr lang="en-US" sz="700" i="1" dirty="0">
+                <a:solidFill>
+                  <a:srgbClr val="94A3B8"/>
+                </a:solidFill>
+                <a:latin typeface="Calibri" pitchFamily="34" charset="0"/>
+                <a:ea typeface="Calibri" pitchFamily="34" charset="-122"/>
+                <a:cs typeface="Calibri" pitchFamily="34" charset="-120"/>
+              </a:rPr>
+              <a:t>links base to suffix</a:t>
+            </a:r>
+            <a:endParaRPr lang="en-US" sz="700" dirty="0"/>
+          </a:p>
+        </p:txBody>
+      </p:sp>
+      <p:sp>
+        <p:nvSpPr>
+          <p:cNvPr id="23" name="Shape 21"/>
+          <p:cNvSpPr/>
+          <p:nvPr/>
+        </p:nvSpPr>
+        <p:spPr>
+          <a:xfrm>
+            <a:off x="6519672" y="2258568"/>
+            <a:ext cx="1828800" cy="292608"/>
+          </a:xfrm>
+          <a:prstGeom prst="rect">
+            <a:avLst>
+              <a:gd name="adj" fmla="val 25000"/>
+            </a:avLst>
+          </a:prstGeom>
+          <a:solidFill>
+            <a:srgbClr val="FCE7F3"/>
+          </a:solidFill>
+          <a:ln w="19050">
+            <a:solidFill>
+              <a:srgbClr val="DB2777"/>
+            </a:solidFill>
+            <a:prstDash val="solid"/>
+          </a:ln>
+          <a:effectLst>
+            <a:outerShdw sx="100000" sy="100000" kx="0" ky="0" algn="bl" rotWithShape="0" blurRad="101600" dist="38100" dir="8100000">
+              <a:srgbClr val="000000">
+                <a:alpha val="12000"/>
+              </a:srgbClr>
+            </a:outerShdw>
+          </a:effectLst>
+        </p:spPr>
+      </p:sp>
+      <p:sp>
+        <p:nvSpPr>
+          <p:cNvPr id="24" name="Text 22"/>
+          <p:cNvSpPr/>
+          <p:nvPr/>
+        </p:nvSpPr>
+        <p:spPr>
+          <a:xfrm>
+            <a:off x="6519672" y="2258568"/>
+            <a:ext cx="1828800" cy="292608"/>
+          </a:xfrm>
+          <a:prstGeom prst="rect">
+            <a:avLst/>
+          </a:prstGeom>
+          <a:noFill/>
+          <a:ln/>
+        </p:spPr>
+        <p:txBody>
+          <a:bodyPr wrap="square" lIns="0" tIns="0" rIns="0" bIns="0" rtlCol="0" anchor="ctr"/>
+          <a:lstStyle/>
+          <a:p>
+            <a:pPr algn="ctr" indent="0" marL="0">
+              <a:buNone/>
+            </a:pPr>
+            <a:r>
+              <a:rPr lang="en-US" sz="1300" b="1" dirty="0">
+                <a:solidFill>
+                  <a:srgbClr val="9D174D"/>
+                </a:solidFill>
+                <a:latin typeface="Trebuchet MS" pitchFamily="34" charset="0"/>
+                <a:ea typeface="Trebuchet MS" pitchFamily="34" charset="-122"/>
+                <a:cs typeface="Trebuchet MS" pitchFamily="34" charset="-120"/>
+              </a:rPr>
+              <a:t>ness</a:t>
+            </a:r>
+            <a:endParaRPr lang="en-US" sz="1300" dirty="0"/>
+          </a:p>
+        </p:txBody>
+      </p:sp>
+      <p:sp>
+        <p:nvSpPr>
+          <p:cNvPr id="25" name="Text 23"/>
+          <p:cNvSpPr/>
+          <p:nvPr/>
+        </p:nvSpPr>
+        <p:spPr>
+          <a:xfrm>
+            <a:off x="6519672" y="2569464"/>
+            <a:ext cx="1828800" cy="201168"/>
+          </a:xfrm>
+          <a:prstGeom prst="rect">
+            <a:avLst/>
+          </a:prstGeom>
+          <a:noFill/>
+          <a:ln/>
+        </p:spPr>
+        <p:txBody>
+          <a:bodyPr wrap="square" lIns="0" tIns="0" rIns="0" bIns="0" rtlCol="0" anchor="t"/>
+          <a:lstStyle/>
+          <a:p>
+            <a:pPr algn="ctr" indent="0" marL="0">
+              <a:buNone/>
+            </a:pPr>
+            <a:r>
+              <a:rPr lang="en-US" sz="850" dirty="0">
+                <a:solidFill>
+                  <a:srgbClr val="475569"/>
+                </a:solidFill>
+                <a:latin typeface="Calibri" pitchFamily="34" charset="0"/>
+                <a:ea typeface="Calibri" pitchFamily="34" charset="-122"/>
+                <a:cs typeface="Calibri" pitchFamily="34" charset="-120"/>
+              </a:rPr>
+              <a:t>state or quality of</a:t>
+            </a:r>
+            <a:endParaRPr lang="en-US" sz="850" dirty="0"/>
+          </a:p>
+        </p:txBody>
+      </p:sp>
+      <p:sp>
+        <p:nvSpPr>
+          <p:cNvPr id="26" name="Shape 24"/>
           <p:cNvSpPr/>
           <p:nvPr/>
         </p:nvSpPr>
@@ -25973,7 +26873,7 @@
       </p:sp>
       <p:sp>
         <p:nvSpPr>
-          <p:cNvPr id="23" name="Text 21"/>
+          <p:cNvPr id="27" name="Text 25"/>
           <p:cNvSpPr/>
           <p:nvPr/>
         </p:nvSpPr>
@@ -26012,7 +26912,7 @@
       </p:sp>
       <p:sp>
         <p:nvSpPr>
-          <p:cNvPr id="24" name="Shape 22"/>
+          <p:cNvPr id="28" name="Shape 26"/>
           <p:cNvSpPr/>
           <p:nvPr/>
         </p:nvSpPr>
@@ -26039,13 +26939,13 @@
       </p:sp>
       <p:sp>
         <p:nvSpPr>
-          <p:cNvPr id="25" name="Shape 23"/>
-          <p:cNvSpPr/>
-          <p:nvPr/>
-        </p:nvSpPr>
-        <p:spPr>
-          <a:xfrm>
-            <a:off x="2999232" y="3364992"/>
+          <p:cNvPr id="29" name="Shape 27"/>
+          <p:cNvSpPr/>
+          <p:nvPr/>
+        </p:nvSpPr>
+        <p:spPr>
+          <a:xfrm>
+            <a:off x="2313432" y="3364992"/>
             <a:ext cx="1645920" cy="475488"/>
           </a:xfrm>
           <a:prstGeom prst="rect">
@@ -26066,13 +26966,13 @@
       </p:sp>
       <p:sp>
         <p:nvSpPr>
-          <p:cNvPr id="26" name="Text 24"/>
-          <p:cNvSpPr/>
-          <p:nvPr/>
-        </p:nvSpPr>
-        <p:spPr>
-          <a:xfrm>
-            <a:off x="2999232" y="3364992"/>
+          <p:cNvPr id="30" name="Text 28"/>
+          <p:cNvSpPr/>
+          <p:nvPr/>
+        </p:nvSpPr>
+        <p:spPr>
+          <a:xfrm>
+            <a:off x="2313432" y="3364992"/>
             <a:ext cx="1645920" cy="475488"/>
           </a:xfrm>
           <a:prstGeom prst="rect">
@@ -26097,7 +26997,7 @@
                 <a:ea typeface="Trebuchet MS" pitchFamily="34" charset="-122"/>
                 <a:cs typeface="Trebuchet MS" pitchFamily="34" charset="-120"/>
               </a:rPr>
-              <a:t>re</a:t>
+              <a:t>read</a:t>
             </a:r>
             <a:endParaRPr lang="en-US" sz="1400" dirty="0"/>
           </a:p>
@@ -26105,14 +27005,14 @@
       </p:sp>
       <p:sp>
         <p:nvSpPr>
-          <p:cNvPr id="27" name="Text 25"/>
-          <p:cNvSpPr/>
-          <p:nvPr/>
-        </p:nvSpPr>
-        <p:spPr>
-          <a:xfrm>
-            <a:off x="4645152" y="3364992"/>
-            <a:ext cx="1097280" cy="475488"/>
+          <p:cNvPr id="31" name="Text 29"/>
+          <p:cNvSpPr/>
+          <p:nvPr/>
+        </p:nvSpPr>
+        <p:spPr>
+          <a:xfrm>
+            <a:off x="3959352" y="3364992"/>
+            <a:ext cx="411480" cy="475488"/>
           </a:xfrm>
           <a:prstGeom prst="rect">
             <a:avLst/>
@@ -26144,13 +27044,13 @@
       </p:sp>
       <p:sp>
         <p:nvSpPr>
-          <p:cNvPr id="28" name="Shape 26"/>
-          <p:cNvSpPr/>
-          <p:nvPr/>
-        </p:nvSpPr>
-        <p:spPr>
-          <a:xfrm>
-            <a:off x="5742432" y="3364992"/>
+          <p:cNvPr id="32" name="Shape 30"/>
+          <p:cNvSpPr/>
+          <p:nvPr/>
+        </p:nvSpPr>
+        <p:spPr>
+          <a:xfrm>
+            <a:off x="4370832" y="3364992"/>
             <a:ext cx="1645920" cy="475488"/>
           </a:xfrm>
           <a:prstGeom prst="rect">
@@ -26171,13 +27071,13 @@
       </p:sp>
       <p:sp>
         <p:nvSpPr>
-          <p:cNvPr id="29" name="Text 27"/>
-          <p:cNvSpPr/>
-          <p:nvPr/>
-        </p:nvSpPr>
-        <p:spPr>
-          <a:xfrm>
-            <a:off x="5742432" y="3364992"/>
+          <p:cNvPr id="33" name="Text 31"/>
+          <p:cNvSpPr/>
+          <p:nvPr/>
+        </p:nvSpPr>
+        <p:spPr>
+          <a:xfrm>
+            <a:off x="4370832" y="3364992"/>
             <a:ext cx="1645920" cy="475488"/>
           </a:xfrm>
           <a:prstGeom prst="rect">
@@ -26202,7 +27102,7 @@
                 <a:ea typeface="Trebuchet MS" pitchFamily="34" charset="-122"/>
                 <a:cs typeface="Trebuchet MS" pitchFamily="34" charset="-120"/>
               </a:rPr>
-              <a:t>read</a:t>
+              <a:t>i</a:t>
             </a:r>
             <a:endParaRPr lang="en-US" sz="1400" dirty="0"/>
           </a:p>
@@ -26210,7 +27110,112 @@
       </p:sp>
       <p:sp>
         <p:nvSpPr>
-          <p:cNvPr id="30" name="Shape 28"/>
+          <p:cNvPr id="34" name="Text 32"/>
+          <p:cNvSpPr/>
+          <p:nvPr/>
+        </p:nvSpPr>
+        <p:spPr>
+          <a:xfrm>
+            <a:off x="6016752" y="3364992"/>
+            <a:ext cx="411480" cy="475488"/>
+          </a:xfrm>
+          <a:prstGeom prst="rect">
+            <a:avLst/>
+          </a:prstGeom>
+          <a:noFill/>
+          <a:ln/>
+        </p:spPr>
+        <p:txBody>
+          <a:bodyPr wrap="square" lIns="0" tIns="0" rIns="0" bIns="0" rtlCol="0" anchor="ctr"/>
+          <a:lstStyle/>
+          <a:p>
+            <a:pPr algn="ctr" indent="0" marL="0">
+              <a:buNone/>
+            </a:pPr>
+            <a:r>
+              <a:rPr lang="en-US" sz="1600" b="1" dirty="0">
+                <a:solidFill>
+                  <a:srgbClr val="0D9488"/>
+                </a:solidFill>
+                <a:latin typeface="Trebuchet MS" pitchFamily="34" charset="0"/>
+                <a:ea typeface="Trebuchet MS" pitchFamily="34" charset="-122"/>
+                <a:cs typeface="Trebuchet MS" pitchFamily="34" charset="-120"/>
+              </a:rPr>
+              <a:t>·</a:t>
+            </a:r>
+            <a:endParaRPr lang="en-US" sz="1600" dirty="0"/>
+          </a:p>
+        </p:txBody>
+      </p:sp>
+      <p:sp>
+        <p:nvSpPr>
+          <p:cNvPr id="35" name="Shape 33"/>
+          <p:cNvSpPr/>
+          <p:nvPr/>
+        </p:nvSpPr>
+        <p:spPr>
+          <a:xfrm>
+            <a:off x="6428232" y="3364992"/>
+            <a:ext cx="1645920" cy="475488"/>
+          </a:xfrm>
+          <a:prstGeom prst="rect">
+            <a:avLst>
+              <a:gd name="adj" fmla="val 9615"/>
+            </a:avLst>
+          </a:prstGeom>
+          <a:solidFill>
+            <a:srgbClr val="FFFFFF"/>
+          </a:solidFill>
+          <a:ln w="12700">
+            <a:solidFill>
+              <a:srgbClr val="0D9488"/>
+            </a:solidFill>
+            <a:prstDash val="solid"/>
+          </a:ln>
+        </p:spPr>
+      </p:sp>
+      <p:sp>
+        <p:nvSpPr>
+          <p:cNvPr id="36" name="Text 34"/>
+          <p:cNvSpPr/>
+          <p:nvPr/>
+        </p:nvSpPr>
+        <p:spPr>
+          <a:xfrm>
+            <a:off x="6428232" y="3364992"/>
+            <a:ext cx="1645920" cy="475488"/>
+          </a:xfrm>
+          <a:prstGeom prst="rect">
+            <a:avLst/>
+          </a:prstGeom>
+          <a:noFill/>
+          <a:ln/>
+        </p:spPr>
+        <p:txBody>
+          <a:bodyPr wrap="square" lIns="0" tIns="0" rIns="0" bIns="0" rtlCol="0" anchor="ctr"/>
+          <a:lstStyle/>
+          <a:p>
+            <a:pPr algn="ctr" indent="0" marL="0">
+              <a:buNone/>
+            </a:pPr>
+            <a:r>
+              <a:rPr lang="en-US" sz="1400" b="1" dirty="0">
+                <a:solidFill>
+                  <a:srgbClr val="0D9488"/>
+                </a:solidFill>
+                <a:latin typeface="Trebuchet MS" pitchFamily="34" charset="0"/>
+                <a:ea typeface="Trebuchet MS" pitchFamily="34" charset="-122"/>
+                <a:cs typeface="Trebuchet MS" pitchFamily="34" charset="-120"/>
+              </a:rPr>
+              <a:t>ness</a:t>
+            </a:r>
+            <a:endParaRPr lang="en-US" sz="1400" dirty="0"/>
+          </a:p>
+        </p:txBody>
+      </p:sp>
+      <p:sp>
+        <p:nvSpPr>
+          <p:cNvPr id="37" name="Shape 35"/>
           <p:cNvSpPr/>
           <p:nvPr/>
         </p:nvSpPr>
@@ -26237,7 +27242,7 @@
       </p:sp>
       <p:sp>
         <p:nvSpPr>
-          <p:cNvPr id="31" name="Text 29"/>
+          <p:cNvPr id="38" name="Text 36"/>
           <p:cNvSpPr/>
           <p:nvPr/>
         </p:nvSpPr>
@@ -26276,7 +27281,7 @@
       </p:sp>
       <p:sp>
         <p:nvSpPr>
-          <p:cNvPr id="32" name="Shape 30"/>
+          <p:cNvPr id="39" name="Shape 37"/>
           <p:cNvSpPr/>
           <p:nvPr/>
         </p:nvSpPr>
@@ -26303,13 +27308,13 @@
       </p:sp>
       <p:sp>
         <p:nvSpPr>
-          <p:cNvPr id="33" name="Shape 31"/>
-          <p:cNvSpPr/>
-          <p:nvPr/>
-        </p:nvSpPr>
-        <p:spPr>
-          <a:xfrm>
-            <a:off x="2427732" y="4169664"/>
+          <p:cNvPr id="40" name="Shape 38"/>
+          <p:cNvSpPr/>
+          <p:nvPr/>
+        </p:nvSpPr>
+        <p:spPr>
+          <a:xfrm>
+            <a:off x="2124837" y="4169664"/>
             <a:ext cx="685800" cy="475488"/>
           </a:xfrm>
           <a:prstGeom prst="rect">
@@ -26330,13 +27335,13 @@
       </p:sp>
       <p:sp>
         <p:nvSpPr>
-          <p:cNvPr id="34" name="Text 32"/>
-          <p:cNvSpPr/>
-          <p:nvPr/>
-        </p:nvSpPr>
-        <p:spPr>
-          <a:xfrm>
-            <a:off x="2427732" y="4169664"/>
+          <p:cNvPr id="41" name="Text 39"/>
+          <p:cNvSpPr/>
+          <p:nvPr/>
+        </p:nvSpPr>
+        <p:spPr>
+          <a:xfrm>
+            <a:off x="2124837" y="4169664"/>
             <a:ext cx="685800" cy="475488"/>
           </a:xfrm>
           <a:prstGeom prst="rect">
@@ -26369,13 +27374,13 @@
       </p:sp>
       <p:sp>
         <p:nvSpPr>
-          <p:cNvPr id="35" name="Shape 33"/>
-          <p:cNvSpPr/>
-          <p:nvPr/>
-        </p:nvSpPr>
-        <p:spPr>
-          <a:xfrm>
-            <a:off x="3639312" y="4169664"/>
+          <p:cNvPr id="42" name="Shape 40"/>
+          <p:cNvSpPr/>
+          <p:nvPr/>
+        </p:nvSpPr>
+        <p:spPr>
+          <a:xfrm>
+            <a:off x="3033522" y="4169664"/>
             <a:ext cx="685800" cy="475488"/>
           </a:xfrm>
           <a:prstGeom prst="rect">
@@ -26396,13 +27401,13 @@
       </p:sp>
       <p:sp>
         <p:nvSpPr>
-          <p:cNvPr id="36" name="Text 34"/>
-          <p:cNvSpPr/>
-          <p:nvPr/>
-        </p:nvSpPr>
-        <p:spPr>
-          <a:xfrm>
-            <a:off x="3639312" y="4169664"/>
+          <p:cNvPr id="43" name="Text 41"/>
+          <p:cNvSpPr/>
+          <p:nvPr/>
+        </p:nvSpPr>
+        <p:spPr>
+          <a:xfrm>
+            <a:off x="3033522" y="4169664"/>
             <a:ext cx="685800" cy="475488"/>
           </a:xfrm>
           <a:prstGeom prst="rect">
@@ -26427,7 +27432,7 @@
                 <a:ea typeface="Trebuchet MS" pitchFamily="34" charset="-122"/>
                 <a:cs typeface="Trebuchet MS" pitchFamily="34" charset="-120"/>
               </a:rPr>
-              <a:t>e</a:t>
+              <a:t>ea</a:t>
             </a:r>
             <a:endParaRPr lang="en-US" sz="900" dirty="0"/>
           </a:p>
@@ -26435,13 +27440,13 @@
       </p:sp>
       <p:sp>
         <p:nvSpPr>
-          <p:cNvPr id="37" name="Shape 35"/>
-          <p:cNvSpPr/>
-          <p:nvPr/>
-        </p:nvSpPr>
-        <p:spPr>
-          <a:xfrm>
-            <a:off x="4850892" y="4169664"/>
+          <p:cNvPr id="44" name="Shape 42"/>
+          <p:cNvSpPr/>
+          <p:nvPr/>
+        </p:nvSpPr>
+        <p:spPr>
+          <a:xfrm>
+            <a:off x="3942207" y="4169664"/>
             <a:ext cx="685800" cy="475488"/>
           </a:xfrm>
           <a:prstGeom prst="rect">
@@ -26462,13 +27467,13 @@
       </p:sp>
       <p:sp>
         <p:nvSpPr>
-          <p:cNvPr id="38" name="Text 36"/>
-          <p:cNvSpPr/>
-          <p:nvPr/>
-        </p:nvSpPr>
-        <p:spPr>
-          <a:xfrm>
-            <a:off x="4850892" y="4169664"/>
+          <p:cNvPr id="45" name="Text 43"/>
+          <p:cNvSpPr/>
+          <p:nvPr/>
+        </p:nvSpPr>
+        <p:spPr>
+          <a:xfrm>
+            <a:off x="3942207" y="4169664"/>
             <a:ext cx="685800" cy="475488"/>
           </a:xfrm>
           <a:prstGeom prst="rect">
@@ -26493,7 +27498,7 @@
                 <a:ea typeface="Trebuchet MS" pitchFamily="34" charset="-122"/>
                 <a:cs typeface="Trebuchet MS" pitchFamily="34" charset="-120"/>
               </a:rPr>
-              <a:t>r</a:t>
+              <a:t>d</a:t>
             </a:r>
             <a:endParaRPr lang="en-US" sz="900" dirty="0"/>
           </a:p>
@@ -26501,13 +27506,13 @@
       </p:sp>
       <p:sp>
         <p:nvSpPr>
-          <p:cNvPr id="39" name="Shape 37"/>
-          <p:cNvSpPr/>
-          <p:nvPr/>
-        </p:nvSpPr>
-        <p:spPr>
-          <a:xfrm>
-            <a:off x="6062472" y="4169664"/>
+          <p:cNvPr id="46" name="Shape 44"/>
+          <p:cNvSpPr/>
+          <p:nvPr/>
+        </p:nvSpPr>
+        <p:spPr>
+          <a:xfrm>
+            <a:off x="4850892" y="4169664"/>
             <a:ext cx="685800" cy="475488"/>
           </a:xfrm>
           <a:prstGeom prst="rect">
@@ -26528,13 +27533,13 @@
       </p:sp>
       <p:sp>
         <p:nvSpPr>
-          <p:cNvPr id="40" name="Text 38"/>
-          <p:cNvSpPr/>
-          <p:nvPr/>
-        </p:nvSpPr>
-        <p:spPr>
-          <a:xfrm>
-            <a:off x="6062472" y="4169664"/>
+          <p:cNvPr id="47" name="Text 45"/>
+          <p:cNvSpPr/>
+          <p:nvPr/>
+        </p:nvSpPr>
+        <p:spPr>
+          <a:xfrm>
+            <a:off x="4850892" y="4169664"/>
             <a:ext cx="685800" cy="475488"/>
           </a:xfrm>
           <a:prstGeom prst="rect">
@@ -26559,7 +27564,7 @@
                 <a:ea typeface="Trebuchet MS" pitchFamily="34" charset="-122"/>
                 <a:cs typeface="Trebuchet MS" pitchFamily="34" charset="-120"/>
               </a:rPr>
-              <a:t>ea</a:t>
+              <a:t>i</a:t>
             </a:r>
             <a:endParaRPr lang="en-US" sz="900" dirty="0"/>
           </a:p>
@@ -26567,13 +27572,13 @@
       </p:sp>
       <p:sp>
         <p:nvSpPr>
-          <p:cNvPr id="41" name="Shape 39"/>
-          <p:cNvSpPr/>
-          <p:nvPr/>
-        </p:nvSpPr>
-        <p:spPr>
-          <a:xfrm>
-            <a:off x="7274052" y="4169664"/>
+          <p:cNvPr id="48" name="Shape 46"/>
+          <p:cNvSpPr/>
+          <p:nvPr/>
+        </p:nvSpPr>
+        <p:spPr>
+          <a:xfrm>
+            <a:off x="5759577" y="4169664"/>
             <a:ext cx="685800" cy="475488"/>
           </a:xfrm>
           <a:prstGeom prst="rect">
@@ -26594,13 +27599,13 @@
       </p:sp>
       <p:sp>
         <p:nvSpPr>
-          <p:cNvPr id="42" name="Text 40"/>
-          <p:cNvSpPr/>
-          <p:nvPr/>
-        </p:nvSpPr>
-        <p:spPr>
-          <a:xfrm>
-            <a:off x="7274052" y="4169664"/>
+          <p:cNvPr id="49" name="Text 47"/>
+          <p:cNvSpPr/>
+          <p:nvPr/>
+        </p:nvSpPr>
+        <p:spPr>
+          <a:xfrm>
+            <a:off x="5759577" y="4169664"/>
             <a:ext cx="685800" cy="475488"/>
           </a:xfrm>
           <a:prstGeom prst="rect">
@@ -26625,7 +27630,139 @@
                 <a:ea typeface="Trebuchet MS" pitchFamily="34" charset="-122"/>
                 <a:cs typeface="Trebuchet MS" pitchFamily="34" charset="-120"/>
               </a:rPr>
-              <a:t>d</a:t>
+              <a:t>n</a:t>
+            </a:r>
+            <a:endParaRPr lang="en-US" sz="900" dirty="0"/>
+          </a:p>
+        </p:txBody>
+      </p:sp>
+      <p:sp>
+        <p:nvSpPr>
+          <p:cNvPr id="50" name="Shape 48"/>
+          <p:cNvSpPr/>
+          <p:nvPr/>
+        </p:nvSpPr>
+        <p:spPr>
+          <a:xfrm>
+            <a:off x="6668262" y="4169664"/>
+            <a:ext cx="685800" cy="475488"/>
+          </a:xfrm>
+          <a:prstGeom prst="rect">
+            <a:avLst>
+              <a:gd name="adj" fmla="val 7692"/>
+            </a:avLst>
+          </a:prstGeom>
+          <a:solidFill>
+            <a:srgbClr val="FFFFFF"/>
+          </a:solidFill>
+          <a:ln w="12700">
+            <a:solidFill>
+              <a:srgbClr val="DB2777"/>
+            </a:solidFill>
+            <a:prstDash val="solid"/>
+          </a:ln>
+        </p:spPr>
+      </p:sp>
+      <p:sp>
+        <p:nvSpPr>
+          <p:cNvPr id="51" name="Text 49"/>
+          <p:cNvSpPr/>
+          <p:nvPr/>
+        </p:nvSpPr>
+        <p:spPr>
+          <a:xfrm>
+            <a:off x="6668262" y="4169664"/>
+            <a:ext cx="685800" cy="475488"/>
+          </a:xfrm>
+          <a:prstGeom prst="rect">
+            <a:avLst/>
+          </a:prstGeom>
+          <a:noFill/>
+          <a:ln/>
+        </p:spPr>
+        <p:txBody>
+          <a:bodyPr wrap="square" lIns="0" tIns="0" rIns="0" bIns="0" rtlCol="0" anchor="ctr"/>
+          <a:lstStyle/>
+          <a:p>
+            <a:pPr algn="ctr" indent="0" marL="0">
+              <a:buNone/>
+            </a:pPr>
+            <a:r>
+              <a:rPr lang="en-US" sz="900" b="1" dirty="0">
+                <a:solidFill>
+                  <a:srgbClr val="9D174D"/>
+                </a:solidFill>
+                <a:latin typeface="Trebuchet MS" pitchFamily="34" charset="0"/>
+                <a:ea typeface="Trebuchet MS" pitchFamily="34" charset="-122"/>
+                <a:cs typeface="Trebuchet MS" pitchFamily="34" charset="-120"/>
+              </a:rPr>
+              <a:t>e</a:t>
+            </a:r>
+            <a:endParaRPr lang="en-US" sz="900" dirty="0"/>
+          </a:p>
+        </p:txBody>
+      </p:sp>
+      <p:sp>
+        <p:nvSpPr>
+          <p:cNvPr id="52" name="Shape 50"/>
+          <p:cNvSpPr/>
+          <p:nvPr/>
+        </p:nvSpPr>
+        <p:spPr>
+          <a:xfrm>
+            <a:off x="7576947" y="4169664"/>
+            <a:ext cx="685800" cy="475488"/>
+          </a:xfrm>
+          <a:prstGeom prst="rect">
+            <a:avLst>
+              <a:gd name="adj" fmla="val 7692"/>
+            </a:avLst>
+          </a:prstGeom>
+          <a:solidFill>
+            <a:srgbClr val="FFFFFF"/>
+          </a:solidFill>
+          <a:ln w="12700">
+            <a:solidFill>
+              <a:srgbClr val="DB2777"/>
+            </a:solidFill>
+            <a:prstDash val="solid"/>
+          </a:ln>
+        </p:spPr>
+      </p:sp>
+      <p:sp>
+        <p:nvSpPr>
+          <p:cNvPr id="53" name="Text 51"/>
+          <p:cNvSpPr/>
+          <p:nvPr/>
+        </p:nvSpPr>
+        <p:spPr>
+          <a:xfrm>
+            <a:off x="7576947" y="4169664"/>
+            <a:ext cx="685800" cy="475488"/>
+          </a:xfrm>
+          <a:prstGeom prst="rect">
+            <a:avLst/>
+          </a:prstGeom>
+          <a:noFill/>
+          <a:ln/>
+        </p:spPr>
+        <p:txBody>
+          <a:bodyPr wrap="square" lIns="0" tIns="0" rIns="0" bIns="0" rtlCol="0" anchor="ctr"/>
+          <a:lstStyle/>
+          <a:p>
+            <a:pPr algn="ctr" indent="0" marL="0">
+              <a:buNone/>
+            </a:pPr>
+            <a:r>
+              <a:rPr lang="en-US" sz="900" b="1" dirty="0">
+                <a:solidFill>
+                  <a:srgbClr val="9D174D"/>
+                </a:solidFill>
+                <a:latin typeface="Trebuchet MS" pitchFamily="34" charset="0"/>
+                <a:ea typeface="Trebuchet MS" pitchFamily="34" charset="-122"/>
+                <a:cs typeface="Trebuchet MS" pitchFamily="34" charset="-120"/>
+              </a:rPr>
+              <a:t>ss</a:t>
             </a:r>
             <a:endParaRPr lang="en-US" sz="900" dirty="0"/>
           </a:p>
@@ -26917,7 +28054,7 @@
                 <a:ea typeface="Calibri" pitchFamily="34" charset="-122"/>
                 <a:cs typeface="Calibri" pitchFamily="34" charset="-120"/>
               </a:rPr>
-              <a:t>Word Labs  •  wordlabs.app  •  Root: 'read' = to look at and understand writing</a:t>
+              <a:t>Word Labs  •  wordlabs.app  •  Root: 'read' = to look at and understand</a:t>
             </a:r>
             <a:endParaRPr lang="en-US" sz="800" dirty="0"/>
           </a:p>
@@ -27056,7 +28193,7 @@
                 <a:ea typeface="Trebuchet MS" pitchFamily="34" charset="-122"/>
                 <a:cs typeface="Trebuchet MS" pitchFamily="34" charset="-120"/>
               </a:rPr>
-              <a:t>misread</a:t>
+              <a:t>unread</a:t>
             </a:r>
             <a:endParaRPr lang="en-US" sz="2800" dirty="0"/>
           </a:p>
@@ -27744,7 +28881,7 @@
                 <a:ea typeface="Calibri" pitchFamily="34" charset="-122"/>
                 <a:cs typeface="Calibri" pitchFamily="34" charset="-120"/>
               </a:rPr>
-              <a:t>Word Labs  •  wordlabs.app  •  Root: 'read' = to look at and understand writing</a:t>
+              <a:t>Word Labs  •  wordlabs.app  •  Root: 'read' = to look at and understand</a:t>
             </a:r>
             <a:endParaRPr lang="en-US" sz="800" dirty="0"/>
           </a:p>
@@ -27883,7 +29020,7 @@
                 <a:ea typeface="Trebuchet MS" pitchFamily="34" charset="-122"/>
                 <a:cs typeface="Trebuchet MS" pitchFamily="34" charset="-120"/>
               </a:rPr>
-              <a:t>misread</a:t>
+              <a:t>unread</a:t>
             </a:r>
             <a:endParaRPr lang="en-US" sz="2800" dirty="0"/>
           </a:p>
@@ -28022,7 +29159,7 @@
                 <a:ea typeface="Trebuchet MS" pitchFamily="34" charset="-122"/>
                 <a:cs typeface="Trebuchet MS" pitchFamily="34" charset="-120"/>
               </a:rPr>
-              <a:t>mis-</a:t>
+              <a:t>un</a:t>
             </a:r>
             <a:endParaRPr lang="en-US" sz="1300" dirty="0"/>
           </a:p>
@@ -28061,7 +29198,7 @@
                 <a:ea typeface="Calibri" pitchFamily="34" charset="-122"/>
                 <a:cs typeface="Calibri" pitchFamily="34" charset="-120"/>
               </a:rPr>
-              <a:t>wrongly or badly</a:t>
+              <a:t>not</a:t>
             </a:r>
             <a:endParaRPr lang="en-US" sz="850" dirty="0"/>
           </a:p>
@@ -28173,7 +29310,7 @@
                 <a:ea typeface="Calibri" pitchFamily="34" charset="-122"/>
                 <a:cs typeface="Calibri" pitchFamily="34" charset="-120"/>
               </a:rPr>
-              <a:t>to look at and understand writing</a:t>
+              <a:t>to look at and understand</a:t>
             </a:r>
             <a:endParaRPr lang="en-US" sz="850" dirty="0"/>
           </a:p>
@@ -28729,7 +29866,7 @@
                 <a:ea typeface="Calibri" pitchFamily="34" charset="-122"/>
                 <a:cs typeface="Calibri" pitchFamily="34" charset="-120"/>
               </a:rPr>
-              <a:t>Word Labs  •  wordlabs.app  •  Root: 'read' = to look at and understand writing</a:t>
+              <a:t>Word Labs  •  wordlabs.app  •  Root: 'read' = to look at and understand</a:t>
             </a:r>
             <a:endParaRPr lang="en-US" sz="800" dirty="0"/>
           </a:p>
@@ -28868,7 +30005,7 @@
                 <a:ea typeface="Trebuchet MS" pitchFamily="34" charset="-122"/>
                 <a:cs typeface="Trebuchet MS" pitchFamily="34" charset="-120"/>
               </a:rPr>
-              <a:t>misread</a:t>
+              <a:t>unread</a:t>
             </a:r>
             <a:endParaRPr lang="en-US" sz="2800" dirty="0"/>
           </a:p>
@@ -29007,7 +30144,7 @@
                 <a:ea typeface="Trebuchet MS" pitchFamily="34" charset="-122"/>
                 <a:cs typeface="Trebuchet MS" pitchFamily="34" charset="-120"/>
               </a:rPr>
-              <a:t>mis-</a:t>
+              <a:t>un</a:t>
             </a:r>
             <a:endParaRPr lang="en-US" sz="1300" dirty="0"/>
           </a:p>
@@ -29046,7 +30183,7 @@
                 <a:ea typeface="Calibri" pitchFamily="34" charset="-122"/>
                 <a:cs typeface="Calibri" pitchFamily="34" charset="-120"/>
               </a:rPr>
-              <a:t>wrongly or badly</a:t>
+              <a:t>not</a:t>
             </a:r>
             <a:endParaRPr lang="en-US" sz="850" dirty="0"/>
           </a:p>
@@ -29158,7 +30295,7 @@
                 <a:ea typeface="Calibri" pitchFamily="34" charset="-122"/>
                 <a:cs typeface="Calibri" pitchFamily="34" charset="-120"/>
               </a:rPr>
-              <a:t>to look at and understand writing</a:t>
+              <a:t>to look at and understand</a:t>
             </a:r>
             <a:endParaRPr lang="en-US" sz="850" dirty="0"/>
           </a:p>
@@ -29317,7 +30454,7 @@
                 <a:ea typeface="Trebuchet MS" pitchFamily="34" charset="-122"/>
                 <a:cs typeface="Trebuchet MS" pitchFamily="34" charset="-120"/>
               </a:rPr>
-              <a:t>mis</a:t>
+              <a:t>un</a:t>
             </a:r>
             <a:endParaRPr lang="en-US" sz="1400" dirty="0"/>
           </a:p>
@@ -29846,7 +30983,7 @@
                 <a:ea typeface="Calibri" pitchFamily="34" charset="-122"/>
                 <a:cs typeface="Calibri" pitchFamily="34" charset="-120"/>
               </a:rPr>
-              <a:t>Word Labs  •  wordlabs.app  •  Root: 'read' = to look at and understand writing</a:t>
+              <a:t>Word Labs  •  wordlabs.app  •  Root: 'read' = to look at and understand</a:t>
             </a:r>
             <a:endParaRPr lang="en-US" sz="800" dirty="0"/>
           </a:p>
@@ -29985,7 +31122,7 @@
                 <a:ea typeface="Trebuchet MS" pitchFamily="34" charset="-122"/>
                 <a:cs typeface="Trebuchet MS" pitchFamily="34" charset="-120"/>
               </a:rPr>
-              <a:t>misread</a:t>
+              <a:t>unread</a:t>
             </a:r>
             <a:endParaRPr lang="en-US" sz="2800" dirty="0"/>
           </a:p>
@@ -30124,7 +31261,7 @@
                 <a:ea typeface="Trebuchet MS" pitchFamily="34" charset="-122"/>
                 <a:cs typeface="Trebuchet MS" pitchFamily="34" charset="-120"/>
               </a:rPr>
-              <a:t>mis-</a:t>
+              <a:t>un</a:t>
             </a:r>
             <a:endParaRPr lang="en-US" sz="1300" dirty="0"/>
           </a:p>
@@ -30163,7 +31300,7 @@
                 <a:ea typeface="Calibri" pitchFamily="34" charset="-122"/>
                 <a:cs typeface="Calibri" pitchFamily="34" charset="-120"/>
               </a:rPr>
-              <a:t>wrongly or badly</a:t>
+              <a:t>not</a:t>
             </a:r>
             <a:endParaRPr lang="en-US" sz="850" dirty="0"/>
           </a:p>
@@ -30275,7 +31412,7 @@
                 <a:ea typeface="Calibri" pitchFamily="34" charset="-122"/>
                 <a:cs typeface="Calibri" pitchFamily="34" charset="-120"/>
               </a:rPr>
-              <a:t>to look at and understand writing</a:t>
+              <a:t>to look at and understand</a:t>
             </a:r>
             <a:endParaRPr lang="en-US" sz="850" dirty="0"/>
           </a:p>
@@ -30434,7 +31571,7 @@
                 <a:ea typeface="Trebuchet MS" pitchFamily="34" charset="-122"/>
                 <a:cs typeface="Trebuchet MS" pitchFamily="34" charset="-120"/>
               </a:rPr>
-              <a:t>mis</a:t>
+              <a:t>un</a:t>
             </a:r>
             <a:endParaRPr lang="en-US" sz="1400" dirty="0"/>
           </a:p>
@@ -30646,7 +31783,7 @@
         </p:nvSpPr>
         <p:spPr>
           <a:xfrm>
-            <a:off x="2254649" y="4169664"/>
+            <a:off x="2427732" y="4169664"/>
             <a:ext cx="685800" cy="475488"/>
           </a:xfrm>
           <a:prstGeom prst="rect">
@@ -30673,7 +31810,7 @@
         </p:nvSpPr>
         <p:spPr>
           <a:xfrm>
-            <a:off x="2254649" y="4169664"/>
+            <a:off x="2427732" y="4169664"/>
             <a:ext cx="685800" cy="475488"/>
           </a:xfrm>
           <a:prstGeom prst="rect">
@@ -30698,7 +31835,7 @@
                 <a:ea typeface="Trebuchet MS" pitchFamily="34" charset="-122"/>
                 <a:cs typeface="Trebuchet MS" pitchFamily="34" charset="-120"/>
               </a:rPr>
-              <a:t>m</a:t>
+              <a:t>u</a:t>
             </a:r>
             <a:endParaRPr lang="en-US" sz="900" dirty="0"/>
           </a:p>
@@ -30712,7 +31849,7 @@
         </p:nvSpPr>
         <p:spPr>
           <a:xfrm>
-            <a:off x="3293146" y="4169664"/>
+            <a:off x="3639312" y="4169664"/>
             <a:ext cx="685800" cy="475488"/>
           </a:xfrm>
           <a:prstGeom prst="rect">
@@ -30739,7 +31876,7 @@
         </p:nvSpPr>
         <p:spPr>
           <a:xfrm>
-            <a:off x="3293146" y="4169664"/>
+            <a:off x="3639312" y="4169664"/>
             <a:ext cx="685800" cy="475488"/>
           </a:xfrm>
           <a:prstGeom prst="rect">
@@ -30764,7 +31901,7 @@
                 <a:ea typeface="Trebuchet MS" pitchFamily="34" charset="-122"/>
                 <a:cs typeface="Trebuchet MS" pitchFamily="34" charset="-120"/>
               </a:rPr>
-              <a:t>i</a:t>
+              <a:t>n</a:t>
             </a:r>
             <a:endParaRPr lang="en-US" sz="900" dirty="0"/>
           </a:p>
@@ -30778,7 +31915,7 @@
         </p:nvSpPr>
         <p:spPr>
           <a:xfrm>
-            <a:off x="4331643" y="4169664"/>
+            <a:off x="4850892" y="4169664"/>
             <a:ext cx="685800" cy="475488"/>
           </a:xfrm>
           <a:prstGeom prst="rect">
@@ -30805,7 +31942,7 @@
         </p:nvSpPr>
         <p:spPr>
           <a:xfrm>
-            <a:off x="4331643" y="4169664"/>
+            <a:off x="4850892" y="4169664"/>
             <a:ext cx="685800" cy="475488"/>
           </a:xfrm>
           <a:prstGeom prst="rect">
@@ -30830,7 +31967,7 @@
                 <a:ea typeface="Trebuchet MS" pitchFamily="34" charset="-122"/>
                 <a:cs typeface="Trebuchet MS" pitchFamily="34" charset="-120"/>
               </a:rPr>
-              <a:t>s</a:t>
+              <a:t>r</a:t>
             </a:r>
             <a:endParaRPr lang="en-US" sz="900" dirty="0"/>
           </a:p>
@@ -30844,7 +31981,7 @@
         </p:nvSpPr>
         <p:spPr>
           <a:xfrm>
-            <a:off x="5370141" y="4169664"/>
+            <a:off x="6062472" y="4169664"/>
             <a:ext cx="685800" cy="475488"/>
           </a:xfrm>
           <a:prstGeom prst="rect">
@@ -30871,7 +32008,7 @@
         </p:nvSpPr>
         <p:spPr>
           <a:xfrm>
-            <a:off x="5370141" y="4169664"/>
+            <a:off x="6062472" y="4169664"/>
             <a:ext cx="685800" cy="475488"/>
           </a:xfrm>
           <a:prstGeom prst="rect">
@@ -30896,7 +32033,7 @@
                 <a:ea typeface="Trebuchet MS" pitchFamily="34" charset="-122"/>
                 <a:cs typeface="Trebuchet MS" pitchFamily="34" charset="-120"/>
               </a:rPr>
-              <a:t>r</a:t>
+              <a:t>ea</a:t>
             </a:r>
             <a:endParaRPr lang="en-US" sz="900" dirty="0"/>
           </a:p>
@@ -30910,7 +32047,7 @@
         </p:nvSpPr>
         <p:spPr>
           <a:xfrm>
-            <a:off x="6408638" y="4169664"/>
+            <a:off x="7274052" y="4169664"/>
             <a:ext cx="685800" cy="475488"/>
           </a:xfrm>
           <a:prstGeom prst="rect">
@@ -30937,73 +32074,7 @@
         </p:nvSpPr>
         <p:spPr>
           <a:xfrm>
-            <a:off x="6408638" y="4169664"/>
-            <a:ext cx="685800" cy="475488"/>
-          </a:xfrm>
-          <a:prstGeom prst="rect">
-            <a:avLst/>
-          </a:prstGeom>
-          <a:noFill/>
-          <a:ln/>
-        </p:spPr>
-        <p:txBody>
-          <a:bodyPr wrap="square" lIns="0" tIns="0" rIns="0" bIns="0" rtlCol="0" anchor="ctr"/>
-          <a:lstStyle/>
-          <a:p>
-            <a:pPr algn="ctr" indent="0" marL="0">
-              <a:buNone/>
-            </a:pPr>
-            <a:r>
-              <a:rPr lang="en-US" sz="900" b="1" dirty="0">
-                <a:solidFill>
-                  <a:srgbClr val="9D174D"/>
-                </a:solidFill>
-                <a:latin typeface="Trebuchet MS" pitchFamily="34" charset="0"/>
-                <a:ea typeface="Trebuchet MS" pitchFamily="34" charset="-122"/>
-                <a:cs typeface="Trebuchet MS" pitchFamily="34" charset="-120"/>
-              </a:rPr>
-              <a:t>ea</a:t>
-            </a:r>
-            <a:endParaRPr lang="en-US" sz="900" dirty="0"/>
-          </a:p>
-        </p:txBody>
-      </p:sp>
-      <p:sp>
-        <p:nvSpPr>
-          <p:cNvPr id="43" name="Shape 41"/>
-          <p:cNvSpPr/>
-          <p:nvPr/>
-        </p:nvSpPr>
-        <p:spPr>
-          <a:xfrm>
-            <a:off x="7447135" y="4169664"/>
-            <a:ext cx="685800" cy="475488"/>
-          </a:xfrm>
-          <a:prstGeom prst="rect">
-            <a:avLst>
-              <a:gd name="adj" fmla="val 7692"/>
-            </a:avLst>
-          </a:prstGeom>
-          <a:solidFill>
-            <a:srgbClr val="FFFFFF"/>
-          </a:solidFill>
-          <a:ln w="12700">
-            <a:solidFill>
-              <a:srgbClr val="DB2777"/>
-            </a:solidFill>
-            <a:prstDash val="solid"/>
-          </a:ln>
-        </p:spPr>
-      </p:sp>
-      <p:sp>
-        <p:nvSpPr>
-          <p:cNvPr id="44" name="Text 42"/>
-          <p:cNvSpPr/>
-          <p:nvPr/>
-        </p:nvSpPr>
-        <p:spPr>
-          <a:xfrm>
-            <a:off x="7447135" y="4169664"/>
+            <a:off x="7274052" y="4169664"/>
             <a:ext cx="685800" cy="475488"/>
           </a:xfrm>
           <a:prstGeom prst="rect">
@@ -31320,7 +32391,7 @@
                 <a:ea typeface="Calibri" pitchFamily="34" charset="-122"/>
                 <a:cs typeface="Calibri" pitchFamily="34" charset="-120"/>
               </a:rPr>
-              <a:t>Word Labs  •  wordlabs.app  •  Root: 'read' = to look at and understand writing</a:t>
+              <a:t>Word Labs  •  wordlabs.app  •  Root: 'read' = to look at and understand</a:t>
             </a:r>
             <a:endParaRPr lang="en-US" sz="800" dirty="0"/>
           </a:p>
@@ -32489,7 +33560,7 @@
                 <a:ea typeface="Calibri" pitchFamily="34" charset="-122"/>
                 <a:cs typeface="Calibri" pitchFamily="34" charset="-120"/>
               </a:rPr>
-              <a:t>Word Labs  •  wordlabs.app  •  Root: 'read' = to look at and understand writing</a:t>
+              <a:t>Word Labs  •  wordlabs.app  •  Root: 'read' = to look at and understand</a:t>
             </a:r>
             <a:endParaRPr lang="en-US" sz="800" dirty="0"/>
           </a:p>
@@ -32790,7 +33861,7 @@
                 <a:ea typeface="Trebuchet MS" pitchFamily="34" charset="-122"/>
                 <a:cs typeface="Trebuchet MS" pitchFamily="34" charset="-120"/>
               </a:rPr>
-              <a:t>re--</a:t>
+              <a:t>re-</a:t>
             </a:r>
             <a:endParaRPr lang="en-US" sz="1300" dirty="0"/>
           </a:p>
@@ -32918,7 +33989,7 @@
                 <a:ea typeface="Trebuchet MS" pitchFamily="34" charset="-122"/>
                 <a:cs typeface="Trebuchet MS" pitchFamily="34" charset="-120"/>
               </a:rPr>
-              <a:t>--er</a:t>
+              <a:t>-er</a:t>
             </a:r>
             <a:endParaRPr lang="en-US" sz="1300" dirty="0"/>
           </a:p>
@@ -32982,7 +34053,7 @@
                 <a:ea typeface="Trebuchet MS" pitchFamily="34" charset="-122"/>
                 <a:cs typeface="Trebuchet MS" pitchFamily="34" charset="-120"/>
               </a:rPr>
-              <a:t>mis--</a:t>
+              <a:t>mis-</a:t>
             </a:r>
             <a:endParaRPr lang="en-US" sz="1300" dirty="0"/>
           </a:p>
@@ -33071,7 +34142,7 @@
                 <a:ea typeface="Trebuchet MS" pitchFamily="34" charset="-122"/>
                 <a:cs typeface="Trebuchet MS" pitchFamily="34" charset="-120"/>
               </a:rPr>
-              <a:t>--ing</a:t>
+              <a:t>-ing</a:t>
             </a:r>
             <a:endParaRPr lang="en-US" sz="1300" dirty="0"/>
           </a:p>
@@ -33135,7 +34206,7 @@
                 <a:ea typeface="Trebuchet MS" pitchFamily="34" charset="-122"/>
                 <a:cs typeface="Trebuchet MS" pitchFamily="34" charset="-120"/>
               </a:rPr>
-              <a:t>un--</a:t>
+              <a:t>un-</a:t>
             </a:r>
             <a:endParaRPr lang="en-US" sz="1300" dirty="0"/>
           </a:p>
@@ -33224,7 +34295,7 @@
                 <a:ea typeface="Trebuchet MS" pitchFamily="34" charset="-122"/>
                 <a:cs typeface="Trebuchet MS" pitchFamily="34" charset="-120"/>
               </a:rPr>
-              <a:t>--able</a:t>
+              <a:t>-able</a:t>
             </a:r>
             <a:endParaRPr lang="en-US" sz="1300" dirty="0"/>
           </a:p>
@@ -33288,7 +34359,7 @@
                 <a:ea typeface="Trebuchet MS" pitchFamily="34" charset="-122"/>
                 <a:cs typeface="Trebuchet MS" pitchFamily="34" charset="-120"/>
               </a:rPr>
-              <a:t>pre--</a:t>
+              <a:t>pre-</a:t>
             </a:r>
             <a:endParaRPr lang="en-US" sz="1300" dirty="0"/>
           </a:p>
@@ -33377,7 +34448,7 @@
                 <a:ea typeface="Trebuchet MS" pitchFamily="34" charset="-122"/>
                 <a:cs typeface="Trebuchet MS" pitchFamily="34" charset="-120"/>
               </a:rPr>
-              <a:t>--ership</a:t>
+              <a:t>-ily</a:t>
             </a:r>
             <a:endParaRPr lang="en-US" sz="1300" dirty="0"/>
           </a:p>
@@ -33441,7 +34512,7 @@
                 <a:ea typeface="Trebuchet MS" pitchFamily="34" charset="-122"/>
                 <a:cs typeface="Trebuchet MS" pitchFamily="34" charset="-120"/>
               </a:rPr>
-              <a:t>speed--</a:t>
+              <a:t>proof-</a:t>
             </a:r>
             <a:endParaRPr lang="en-US" sz="1300" dirty="0"/>
           </a:p>
@@ -33530,7 +34601,7 @@
                 <a:ea typeface="Trebuchet MS" pitchFamily="34" charset="-122"/>
                 <a:cs typeface="Trebuchet MS" pitchFamily="34" charset="-120"/>
               </a:rPr>
-              <a:t>--out</a:t>
+              <a:t>-iness</a:t>
             </a:r>
             <a:endParaRPr lang="en-US" sz="1300" dirty="0"/>
           </a:p>
@@ -34031,7 +35102,7 @@
                 <a:ea typeface="Trebuchet MS" pitchFamily="34" charset="-122"/>
                 <a:cs typeface="Trebuchet MS" pitchFamily="34" charset="-120"/>
               </a:rPr>
-              <a:t>prereading</a:t>
+              <a:t>preread</a:t>
             </a:r>
             <a:endParaRPr lang="en-US" sz="1200" dirty="0"/>
           </a:p>
@@ -34097,7 +35168,7 @@
                 <a:ea typeface="Trebuchet MS" pitchFamily="34" charset="-122"/>
                 <a:cs typeface="Trebuchet MS" pitchFamily="34" charset="-120"/>
               </a:rPr>
-              <a:t>readership</a:t>
+              <a:t>readiness</a:t>
             </a:r>
             <a:endParaRPr lang="en-US" sz="1200" dirty="0"/>
           </a:p>
@@ -34389,7 +35460,7 @@
                 <a:ea typeface="Calibri" pitchFamily="34" charset="-122"/>
                 <a:cs typeface="Calibri" pitchFamily="34" charset="-120"/>
               </a:rPr>
-              <a:t>Word Labs  •  wordlabs.app  •  Root: 'read' = to look at and understand writing</a:t>
+              <a:t>Word Labs  •  wordlabs.app  •  Root: 'read' = to look at and understand</a:t>
             </a:r>
             <a:endParaRPr lang="en-US" sz="800" dirty="0"/>
           </a:p>
@@ -34553,7 +35624,7 @@
                 <a:ea typeface="Calibri" pitchFamily="34" charset="-122"/>
                 <a:cs typeface="Calibri" pitchFamily="34" charset="-120"/>
               </a:rPr>
-              <a:t>The core part of a word carrying its basic meaning. For example, 'read' means 'to look at and understand writing'.</a:t>
+              <a:t>The core part of a word carrying its basic meaning. For example, 'read' means 'to look at and understand'.</a:t>
             </a:r>
             <a:endParaRPr lang="en-US" sz="1350" dirty="0"/>
           </a:p>
@@ -35173,7 +36244,7 @@
                 <a:ea typeface="Calibri" pitchFamily="34" charset="-122"/>
                 <a:cs typeface="Calibri" pitchFamily="34" charset="-120"/>
               </a:rPr>
-              <a:t>Word Labs  •  wordlabs.app  •  Root: 'read' = to look at and understand writing</a:t>
+              <a:t>Word Labs  •  wordlabs.app  •  Root: 'read' = to look at and understand</a:t>
             </a:r>
             <a:endParaRPr lang="en-US" sz="800" dirty="0"/>
           </a:p>
@@ -35285,7 +36356,7 @@
                 <a:ea typeface="Calibri" pitchFamily="34" charset="-122"/>
                 <a:cs typeface="Calibri" pitchFamily="34" charset="-120"/>
               </a:rPr>
-              <a:t>1.  The word 'misread' means to read something incorrectly.</a:t>
+              <a:t>1.  The word 'misread' contains the root 'read'.</a:t>
             </a:r>
             <a:endParaRPr lang="en-US" sz="1300" dirty="0"/>
           </a:p>
@@ -35424,7 +36495,7 @@
                 <a:ea typeface="Calibri" pitchFamily="34" charset="-122"/>
                 <a:cs typeface="Calibri" pitchFamily="34" charset="-120"/>
               </a:rPr>
-              <a:t>2.  The word 'readable' contains a prefix.</a:t>
+              <a:t>2.  The root 'read' comes from ancient Greek.</a:t>
             </a:r>
             <a:endParaRPr lang="en-US" sz="1300" dirty="0"/>
           </a:p>
@@ -35563,7 +36634,7 @@
                 <a:ea typeface="Calibri" pitchFamily="34" charset="-122"/>
                 <a:cs typeface="Calibri" pitchFamily="34" charset="-120"/>
               </a:rPr>
-              <a:t>3.  The word 'reread' means to read something again.</a:t>
+              <a:t>3.  Adding the prefix 're' to 'read' makes a word meaning to read again.</a:t>
             </a:r>
             <a:endParaRPr lang="en-US" sz="1300" dirty="0"/>
           </a:p>
@@ -35702,7 +36773,7 @@
                 <a:ea typeface="Calibri" pitchFamily="34" charset="-122"/>
                 <a:cs typeface="Calibri" pitchFamily="34" charset="-120"/>
               </a:rPr>
-              <a:t>4.  A 'readership' refers to all the people who read a particular publication.</a:t>
+              <a:t>4.  The suffix '-able' in 'readable' means 'able to be'.</a:t>
             </a:r>
             <a:endParaRPr lang="en-US" sz="1300" dirty="0"/>
           </a:p>
@@ -35841,7 +36912,7 @@
                 <a:ea typeface="Calibri" pitchFamily="34" charset="-122"/>
                 <a:cs typeface="Calibri" pitchFamily="34" charset="-120"/>
               </a:rPr>
-              <a:t>5.  The prefix 'pre-' in 'prereading' means after.</a:t>
+              <a:t>5.  The word 'unread' means someone who reads very quickly.</a:t>
             </a:r>
             <a:endParaRPr lang="en-US" sz="1300" dirty="0"/>
           </a:p>
@@ -36199,7 +37270,7 @@
                 <a:ea typeface="Calibri" pitchFamily="34" charset="-122"/>
                 <a:cs typeface="Calibri" pitchFamily="34" charset="-120"/>
               </a:rPr>
-              <a:t>Word Labs  •  wordlabs.app  •  Root: 'read' = to look at and understand writing</a:t>
+              <a:t>Word Labs  •  wordlabs.app  •  Root: 'read' = to look at and understand</a:t>
             </a:r>
             <a:endParaRPr lang="en-US" sz="800" dirty="0"/>
           </a:p>
@@ -36336,7 +37407,7 @@
                 <a:ea typeface="Trebuchet MS" pitchFamily="34" charset="-122"/>
                 <a:cs typeface="Trebuchet MS" pitchFamily="34" charset="-120"/>
               </a:rPr>
-              <a:t>to look at and understand writing</a:t>
+              <a:t>to look at and understand</a:t>
             </a:r>
             <a:endParaRPr lang="en-US" sz="2000" dirty="0"/>
           </a:p>
@@ -36375,7 +37446,7 @@
                 <a:ea typeface="Calibri" pitchFamily="34" charset="-122"/>
                 <a:cs typeface="Calibri" pitchFamily="34" charset="-120"/>
               </a:rPr>
-              <a:t>Origin: Old English: rǣdan</a:t>
+              <a:t>Origin: Old English: raedan</a:t>
             </a:r>
             <a:endParaRPr lang="en-US" sz="1100" dirty="0"/>
           </a:p>
@@ -36876,7 +37947,7 @@
                 <a:ea typeface="Trebuchet MS" pitchFamily="34" charset="-122"/>
                 <a:cs typeface="Trebuchet MS" pitchFamily="34" charset="-120"/>
               </a:rPr>
-              <a:t>prereading</a:t>
+              <a:t>preread</a:t>
             </a:r>
             <a:endParaRPr lang="en-US" sz="1300" dirty="0"/>
           </a:p>
@@ -37168,7 +38239,7 @@
                 <a:ea typeface="Calibri" pitchFamily="34" charset="-122"/>
                 <a:cs typeface="Calibri" pitchFamily="34" charset="-120"/>
               </a:rPr>
-              <a:t>Word Labs  •  wordlabs.app  •  Root: 'read' = to look at and understand writing</a:t>
+              <a:t>Word Labs  •  wordlabs.app  •  Root: 'read' = to look at and understand</a:t>
             </a:r>
             <a:endParaRPr lang="en-US" sz="800" dirty="0"/>
           </a:p>
@@ -37469,7 +38540,7 @@
                 <a:ea typeface="Trebuchet MS" pitchFamily="34" charset="-122"/>
                 <a:cs typeface="Trebuchet MS" pitchFamily="34" charset="-120"/>
               </a:rPr>
-              <a:t>re--</a:t>
+              <a:t>re-</a:t>
             </a:r>
             <a:endParaRPr lang="en-US" sz="1300" dirty="0"/>
           </a:p>
@@ -37597,7 +38668,7 @@
                 <a:ea typeface="Trebuchet MS" pitchFamily="34" charset="-122"/>
                 <a:cs typeface="Trebuchet MS" pitchFamily="34" charset="-120"/>
               </a:rPr>
-              <a:t>--er</a:t>
+              <a:t>-er</a:t>
             </a:r>
             <a:endParaRPr lang="en-US" sz="1300" dirty="0"/>
           </a:p>
@@ -37661,7 +38732,7 @@
                 <a:ea typeface="Trebuchet MS" pitchFamily="34" charset="-122"/>
                 <a:cs typeface="Trebuchet MS" pitchFamily="34" charset="-120"/>
               </a:rPr>
-              <a:t>mis--</a:t>
+              <a:t>mis-</a:t>
             </a:r>
             <a:endParaRPr lang="en-US" sz="1300" dirty="0"/>
           </a:p>
@@ -37750,7 +38821,7 @@
                 <a:ea typeface="Trebuchet MS" pitchFamily="34" charset="-122"/>
                 <a:cs typeface="Trebuchet MS" pitchFamily="34" charset="-120"/>
               </a:rPr>
-              <a:t>--ing</a:t>
+              <a:t>-ing</a:t>
             </a:r>
             <a:endParaRPr lang="en-US" sz="1300" dirty="0"/>
           </a:p>
@@ -37814,7 +38885,7 @@
                 <a:ea typeface="Trebuchet MS" pitchFamily="34" charset="-122"/>
                 <a:cs typeface="Trebuchet MS" pitchFamily="34" charset="-120"/>
               </a:rPr>
-              <a:t>un--</a:t>
+              <a:t>un-</a:t>
             </a:r>
             <a:endParaRPr lang="en-US" sz="1300" dirty="0"/>
           </a:p>
@@ -37903,7 +38974,7 @@
                 <a:ea typeface="Trebuchet MS" pitchFamily="34" charset="-122"/>
                 <a:cs typeface="Trebuchet MS" pitchFamily="34" charset="-120"/>
               </a:rPr>
-              <a:t>--able</a:t>
+              <a:t>-able</a:t>
             </a:r>
             <a:endParaRPr lang="en-US" sz="1300" dirty="0"/>
           </a:p>
@@ -37967,7 +39038,7 @@
                 <a:ea typeface="Trebuchet MS" pitchFamily="34" charset="-122"/>
                 <a:cs typeface="Trebuchet MS" pitchFamily="34" charset="-120"/>
               </a:rPr>
-              <a:t>pre--</a:t>
+              <a:t>pre-</a:t>
             </a:r>
             <a:endParaRPr lang="en-US" sz="1300" dirty="0"/>
           </a:p>
@@ -38056,7 +39127,7 @@
                 <a:ea typeface="Trebuchet MS" pitchFamily="34" charset="-122"/>
                 <a:cs typeface="Trebuchet MS" pitchFamily="34" charset="-120"/>
               </a:rPr>
-              <a:t>--ership</a:t>
+              <a:t>-ily</a:t>
             </a:r>
             <a:endParaRPr lang="en-US" sz="1300" dirty="0"/>
           </a:p>
@@ -38120,7 +39191,7 @@
                 <a:ea typeface="Trebuchet MS" pitchFamily="34" charset="-122"/>
                 <a:cs typeface="Trebuchet MS" pitchFamily="34" charset="-120"/>
               </a:rPr>
-              <a:t>speed--</a:t>
+              <a:t>proof-</a:t>
             </a:r>
             <a:endParaRPr lang="en-US" sz="1300" dirty="0"/>
           </a:p>
@@ -38209,7 +39280,7 @@
                 <a:ea typeface="Trebuchet MS" pitchFamily="34" charset="-122"/>
                 <a:cs typeface="Trebuchet MS" pitchFamily="34" charset="-120"/>
               </a:rPr>
-              <a:t>--out</a:t>
+              <a:t>-iness</a:t>
             </a:r>
             <a:endParaRPr lang="en-US" sz="1300" dirty="0"/>
           </a:p>
@@ -38263,7 +39334,7 @@
         <p:spPr>
           <a:xfrm>
             <a:off x="1508760" y="4178808"/>
-            <a:ext cx="950976" cy="420624"/>
+            <a:ext cx="822960" cy="420624"/>
           </a:xfrm>
           <a:prstGeom prst="rect">
             <a:avLst>
@@ -38297,7 +39368,7 @@
         <p:spPr>
           <a:xfrm>
             <a:off x="1508760" y="4178808"/>
-            <a:ext cx="950976" cy="420624"/>
+            <a:ext cx="822960" cy="420624"/>
           </a:xfrm>
           <a:prstGeom prst="rect">
             <a:avLst/>
@@ -38321,7 +39392,7 @@
                 <a:ea typeface="Trebuchet MS" pitchFamily="34" charset="-122"/>
                 <a:cs typeface="Trebuchet MS" pitchFamily="34" charset="-120"/>
               </a:rPr>
-              <a:t>re--</a:t>
+              <a:t>re-</a:t>
             </a:r>
             <a:endParaRPr lang="en-US" sz="1300" dirty="0"/>
           </a:p>
@@ -38335,7 +39406,7 @@
         </p:nvSpPr>
         <p:spPr>
           <a:xfrm>
-            <a:off x="2487168" y="4178808"/>
+            <a:off x="2359152" y="4178808"/>
             <a:ext cx="320040" cy="420624"/>
           </a:xfrm>
           <a:prstGeom prst="rect">
@@ -38374,7 +39445,7 @@
         </p:nvSpPr>
         <p:spPr>
           <a:xfrm>
-            <a:off x="2834640" y="4178808"/>
+            <a:off x="2706624" y="4178808"/>
             <a:ext cx="1243584" cy="420624"/>
           </a:xfrm>
           <a:prstGeom prst="rect">
@@ -38408,7 +39479,7 @@
         </p:nvSpPr>
         <p:spPr>
           <a:xfrm>
-            <a:off x="2834640" y="4178808"/>
+            <a:off x="2706624" y="4178808"/>
             <a:ext cx="1243584" cy="420624"/>
           </a:xfrm>
           <a:prstGeom prst="rect">
@@ -38447,7 +39518,7 @@
         </p:nvSpPr>
         <p:spPr>
           <a:xfrm>
-            <a:off x="4105656" y="4178808"/>
+            <a:off x="3977640" y="4178808"/>
             <a:ext cx="320040" cy="420624"/>
           </a:xfrm>
           <a:prstGeom prst="rect">
@@ -38486,8 +39557,8 @@
         </p:nvSpPr>
         <p:spPr>
           <a:xfrm>
-            <a:off x="4453128" y="4178808"/>
-            <a:ext cx="950976" cy="420624"/>
+            <a:off x="4325112" y="4178808"/>
+            <a:ext cx="822960" cy="420624"/>
           </a:xfrm>
           <a:prstGeom prst="rect">
             <a:avLst>
@@ -38520,8 +39591,8 @@
         </p:nvSpPr>
         <p:spPr>
           <a:xfrm>
-            <a:off x="4453128" y="4178808"/>
-            <a:ext cx="950976" cy="420624"/>
+            <a:off x="4325112" y="4178808"/>
+            <a:ext cx="822960" cy="420624"/>
           </a:xfrm>
           <a:prstGeom prst="rect">
             <a:avLst/>
@@ -38545,7 +39616,7 @@
                 <a:ea typeface="Trebuchet MS" pitchFamily="34" charset="-122"/>
                 <a:cs typeface="Trebuchet MS" pitchFamily="34" charset="-120"/>
               </a:rPr>
-              <a:t>--er</a:t>
+              <a:t>-er</a:t>
             </a:r>
             <a:endParaRPr lang="en-US" sz="1300" dirty="0"/>
           </a:p>
@@ -38559,7 +39630,7 @@
         </p:nvSpPr>
         <p:spPr>
           <a:xfrm>
-            <a:off x="5477256" y="4178808"/>
+            <a:off x="5221224" y="4178808"/>
             <a:ext cx="365760" cy="420624"/>
           </a:xfrm>
           <a:prstGeom prst="rect">
@@ -38598,7 +39669,7 @@
         </p:nvSpPr>
         <p:spPr>
           <a:xfrm>
-            <a:off x="5888736" y="4178808"/>
+            <a:off x="5632704" y="4178808"/>
             <a:ext cx="2194560" cy="420624"/>
           </a:xfrm>
           <a:prstGeom prst="rect">
@@ -38625,7 +39696,7 @@
         </p:nvSpPr>
         <p:spPr>
           <a:xfrm>
-            <a:off x="5888736" y="4178808"/>
+            <a:off x="5632704" y="4178808"/>
             <a:ext cx="2194560" cy="420624"/>
           </a:xfrm>
           <a:prstGeom prst="rect">
@@ -38942,7 +40013,7 @@
                 <a:ea typeface="Calibri" pitchFamily="34" charset="-122"/>
                 <a:cs typeface="Calibri" pitchFamily="34" charset="-120"/>
               </a:rPr>
-              <a:t>Word Labs  •  wordlabs.app  •  Root: 'read' = to look at and understand writing</a:t>
+              <a:t>Word Labs  •  wordlabs.app  •  Root: 'read' = to look at and understand</a:t>
             </a:r>
             <a:endParaRPr lang="en-US" sz="800" dirty="0"/>
           </a:p>
@@ -39120,7 +40191,7 @@
                 <a:ea typeface="Calibri" pitchFamily="34" charset="-122"/>
                 <a:cs typeface="Calibri" pitchFamily="34" charset="-120"/>
               </a:rPr>
-              <a:t>To read something incorrectly or get the wrong meaning.</a:t>
+              <a:t>To read or understand something incorrectly.</a:t>
             </a:r>
             <a:endParaRPr lang="en-US" sz="1200" dirty="0"/>
           </a:p>
@@ -39259,7 +40330,7 @@
                 <a:ea typeface="Calibri" pitchFamily="34" charset="-122"/>
                 <a:cs typeface="Calibri" pitchFamily="34" charset="-120"/>
               </a:rPr>
-              <a:t>To read something again from the beginning.</a:t>
+              <a:t>To read something again a second time.</a:t>
             </a:r>
             <a:endParaRPr lang="en-US" sz="1200" dirty="0"/>
           </a:p>
@@ -39398,7 +40469,7 @@
                 <a:ea typeface="Calibri" pitchFamily="34" charset="-122"/>
                 <a:cs typeface="Calibri" pitchFamily="34" charset="-120"/>
               </a:rPr>
-              <a:t>Something that is easy and enjoyable to read.</a:t>
+              <a:t>Easy and enjoyable to read.</a:t>
             </a:r>
             <a:endParaRPr lang="en-US" sz="1200" dirty="0"/>
           </a:p>
@@ -39537,7 +40608,7 @@
                 <a:ea typeface="Calibri" pitchFamily="34" charset="-122"/>
                 <a:cs typeface="Calibri" pitchFamily="34" charset="-120"/>
               </a:rPr>
-              <a:t>Activities you do before you start reading a text.</a:t>
+              <a:t>To read something before a main activity or lesson.</a:t>
             </a:r>
             <a:endParaRPr lang="en-US" sz="1200" dirty="0"/>
           </a:p>
@@ -39888,7 +40959,7 @@
                 <a:ea typeface="Trebuchet MS" pitchFamily="34" charset="-122"/>
                 <a:cs typeface="Trebuchet MS" pitchFamily="34" charset="-120"/>
               </a:rPr>
-              <a:t>prereading</a:t>
+              <a:t>preread</a:t>
             </a:r>
             <a:endParaRPr lang="en-US" sz="1200" dirty="0"/>
           </a:p>
@@ -39954,7 +41025,7 @@
                 <a:ea typeface="Calibri" pitchFamily="34" charset="-122"/>
                 <a:cs typeface="Calibri" pitchFamily="34" charset="-120"/>
               </a:rPr>
-              <a:t>The activity of looking at and understanding written words.</a:t>
+              <a:t>The act of looking at words and understanding them.</a:t>
             </a:r>
             <a:endParaRPr lang="en-US" sz="1200" dirty="0"/>
           </a:p>
@@ -40246,7 +41317,7 @@
                 <a:ea typeface="Calibri" pitchFamily="34" charset="-122"/>
                 <a:cs typeface="Calibri" pitchFamily="34" charset="-120"/>
               </a:rPr>
-              <a:t>Word Labs  •  wordlabs.app  •  Root: 'read' = to look at and understand writing</a:t>
+              <a:t>Word Labs  •  wordlabs.app  •  Root: 'read' = to look at and understand</a:t>
             </a:r>
             <a:endParaRPr lang="en-US" sz="800" dirty="0"/>
           </a:p>
@@ -40449,7 +41520,7 @@
                 <a:ea typeface="Calibri" pitchFamily="34" charset="-122"/>
                 <a:cs typeface="Calibri" pitchFamily="34" charset="-120"/>
               </a:rPr>
-              <a:t>The teacher asked the class to reread the passage carefully before answering the questions.</a:t>
+              <a:t>The teacher asked us to reread the passage carefully so we could answer the comprehension questions.</a:t>
             </a:r>
             <a:endParaRPr lang="en-US" sz="1500" dirty="0"/>
           </a:p>
@@ -40613,7 +41684,7 @@
                 <a:ea typeface="Calibri" pitchFamily="34" charset="-122"/>
                 <a:cs typeface="Calibri" pitchFamily="34" charset="-120"/>
               </a:rPr>
-              <a:t>She found the novel very readable because the author used simple, clear language.</a:t>
+              <a:t>Maya found the novel so readable that she finished the whole book in one weekend.</a:t>
             </a:r>
             <a:endParaRPr lang="en-US" sz="1500" dirty="0"/>
           </a:p>
@@ -40777,7 +41848,7 @@
                 <a:ea typeface="Calibri" pitchFamily="34" charset="-122"/>
                 <a:cs typeface="Calibri" pitchFamily="34" charset="-120"/>
               </a:rPr>
-              <a:t>The readership of that popular magazine has grown to over one million people.</a:t>
+              <a:t>If you misread the instructions, your experiment might not turn out the way you planned.</a:t>
             </a:r>
             <a:endParaRPr lang="en-US" sz="1500" dirty="0"/>
           </a:p>
